--- a/.codex-output/2609_업무 지침 네비게이터_발표자료.pptx
+++ b/.codex-output/2609_업무 지침 네비게이터_발표자료.pptx
@@ -3332,7 +3332,7 @@
                 <a:ea typeface="맑은 고딕" panose="020B0503020000020004" pitchFamily="50" charset="-127"/>
                 <a:cs typeface="+mn-cs"/>
               </a:rPr>
-              <a:t>업무 지침 네비게이터 </a:t>
+              <a:t>업무 지침 네비게이터</a:t>
             </a:r>
             <a:r>
               <a:rPr kumimoji="0" lang="en-US" altLang="ko-KR" sz="2000" b="1" i="0" u="none" strike="noStrike" kern="1200" cap="none" spc="-100" normalizeH="0" baseline="0" noProof="0">

--- a/.codex-output/2609_업무 지침 네비게이터_발표자료.pptx
+++ b/.codex-output/2609_업무 지침 네비게이터_발표자료.pptx
@@ -4904,7 +4904,7 @@
         <p:spPr>
           <a:xfrm>
             <a:off x="358024" y="4937510"/>
-            <a:ext cx="9409457" cy="1771914"/>
+            <a:ext cx="9409457" cy="1801656"/>
           </a:xfrm>
           <a:prstGeom prst="rect">
             <a:avLst/>
@@ -6558,7 +6558,7 @@
               <a:defRPr/>
             </a:pPr>
             <a:r>
-              <a:rPr kumimoji="0" lang="ko-KR" altLang="en-US" sz="1300" b="0" i="0" u="none" strike="noStrike" kern="1200" cap="none" spc="-40" normalizeH="0" baseline="0" noProof="0">
+              <a:rPr kumimoji="0" lang="ko-KR" altLang="en-US" sz="1300" i="0" u="none" strike="noStrike" kern="1200" cap="none" spc="-40" normalizeH="0" baseline="0" noProof="0">
                 <a:ln>
                   <a:noFill/>
                 </a:ln>
@@ -6568,15 +6568,14 @@
                 <a:effectLst/>
                 <a:uLnTx/>
                 <a:uFillTx/>
-                <a:latin typeface="맑은 고딕"/>
-                <a:ea typeface="맑은 고딕" panose="020B0503020000020004" pitchFamily="50" charset="-127"/>
+                <a:latin typeface="+mn-ea"/>
                 <a:cs typeface="+mn-cs"/>
                 <a:sym typeface="Wingdings" pitchFamily="2" charset="2"/>
               </a:rPr>
               <a:t>○ 구축 범위 설정 </a:t>
             </a:r>
             <a:r>
-              <a:rPr kumimoji="0" lang="en-US" altLang="ko-KR" sz="1300" b="0" i="0" u="none" strike="noStrike" kern="1200" cap="none" spc="-40" normalizeH="0" baseline="0" noProof="0">
+              <a:rPr kumimoji="0" lang="en-US" altLang="ko-KR" sz="1300" i="0" u="none" strike="noStrike" kern="1200" cap="none" spc="-40" normalizeH="0" baseline="0" noProof="0">
                 <a:ln>
                   <a:noFill/>
                 </a:ln>
@@ -6586,15 +6585,14 @@
                 <a:effectLst/>
                 <a:uLnTx/>
                 <a:uFillTx/>
-                <a:latin typeface="맑은 고딕"/>
-                <a:ea typeface="맑은 고딕" panose="020B0503020000020004" pitchFamily="50" charset="-127"/>
+                <a:latin typeface="+mn-ea"/>
                 <a:cs typeface="+mn-cs"/>
                 <a:sym typeface="Wingdings" pitchFamily="2" charset="2"/>
               </a:rPr>
               <a:t>: </a:t>
             </a:r>
             <a:r>
-              <a:rPr kumimoji="0" lang="ko-KR" altLang="en-US" sz="1300" b="0" i="0" u="none" strike="noStrike" kern="1200" cap="none" spc="-40" normalizeH="0" baseline="0" noProof="0">
+              <a:rPr kumimoji="0" lang="ko-KR" altLang="en-US" sz="1300" i="0" u="none" strike="noStrike" kern="1200" cap="none" spc="-40" normalizeH="0" baseline="0" noProof="0">
                 <a:ln>
                   <a:noFill/>
                 </a:ln>
@@ -6604,15 +6602,14 @@
                 <a:effectLst/>
                 <a:uLnTx/>
                 <a:uFillTx/>
-                <a:latin typeface="맑은 고딕"/>
-                <a:ea typeface="맑은 고딕" panose="020B0503020000020004" pitchFamily="50" charset="-127"/>
+                <a:latin typeface="+mn-ea"/>
                 <a:cs typeface="+mn-cs"/>
                 <a:sym typeface="Wingdings" pitchFamily="2" charset="2"/>
               </a:rPr>
               <a:t>핵심 기능 구현 가능성 확인 후</a:t>
             </a:r>
             <a:r>
-              <a:rPr kumimoji="0" lang="en-US" altLang="ko-KR" sz="1300" b="0" i="0" u="none" strike="noStrike" kern="1200" cap="none" spc="-40" normalizeH="0" baseline="0" noProof="0">
+              <a:rPr kumimoji="0" lang="en-US" altLang="ko-KR" sz="1300" i="0" u="none" strike="noStrike" kern="1200" cap="none" spc="-40" normalizeH="0" baseline="0" noProof="0">
                 <a:ln>
                   <a:noFill/>
                 </a:ln>
@@ -6622,15 +6619,14 @@
                 <a:effectLst/>
                 <a:uLnTx/>
                 <a:uFillTx/>
-                <a:latin typeface="맑은 고딕"/>
-                <a:ea typeface="맑은 고딕" panose="020B0503020000020004" pitchFamily="50" charset="-127"/>
+                <a:latin typeface="+mn-ea"/>
                 <a:cs typeface="+mn-cs"/>
                 <a:sym typeface="Wingdings" pitchFamily="2" charset="2"/>
               </a:rPr>
               <a:t>, </a:t>
             </a:r>
             <a:r>
-              <a:rPr kumimoji="0" lang="ko-KR" altLang="en-US" sz="1300" b="0" i="0" u="none" strike="noStrike" kern="1200" cap="none" spc="-40" normalizeH="0" baseline="0" noProof="0">
+              <a:rPr kumimoji="0" lang="ko-KR" altLang="en-US" sz="1300" i="0" u="none" strike="noStrike" kern="1200" cap="none" spc="-40" normalizeH="0" baseline="0" noProof="0">
                 <a:ln>
                   <a:noFill/>
                 </a:ln>
@@ -6640,8 +6636,7 @@
                 <a:effectLst/>
                 <a:uLnTx/>
                 <a:uFillTx/>
-                <a:latin typeface="맑은 고딕"/>
-                <a:ea typeface="맑은 고딕" panose="020B0503020000020004" pitchFamily="50" charset="-127"/>
+                <a:latin typeface="+mn-ea"/>
                 <a:cs typeface="+mn-cs"/>
                 <a:sym typeface="Wingdings" pitchFamily="2" charset="2"/>
               </a:rPr>
@@ -6651,8 +6646,7 @@
               <a:solidFill>
                 <a:prstClr val="black"/>
               </a:solidFill>
-              <a:latin typeface="맑은 고딕"/>
-              <a:ea typeface="맑은 고딕" panose="020B0503020000020004" pitchFamily="50" charset="-127"/>
+              <a:latin typeface="+mn-ea"/>
               <a:sym typeface="Wingdings" pitchFamily="2" charset="2"/>
             </a:endParaRPr>
           </a:p>
@@ -6675,7 +6669,7 @@
               <a:defRPr/>
             </a:pPr>
             <a:r>
-              <a:rPr kumimoji="0" lang="en-US" altLang="ko-KR" sz="1300" b="1" i="0" u="none" strike="noStrike" kern="1200" cap="none" spc="-40" normalizeH="0" baseline="0" noProof="0">
+              <a:rPr kumimoji="0" lang="en-US" altLang="ko-KR" sz="1300" i="0" u="none" strike="noStrike" kern="1200" cap="none" spc="-40" normalizeH="0" baseline="0" noProof="0">
                 <a:ln>
                   <a:noFill/>
                 </a:ln>
@@ -6685,43 +6679,58 @@
                 <a:effectLst/>
                 <a:uLnTx/>
                 <a:uFillTx/>
-                <a:latin typeface="맑은 고딕"/>
-                <a:ea typeface="맑은 고딕" panose="020B0503020000020004" pitchFamily="50" charset="-127"/>
+                <a:latin typeface="+mn-ea"/>
                 <a:cs typeface="+mn-cs"/>
                 <a:sym typeface="Wingdings" pitchFamily="2" charset="2"/>
               </a:rPr>
               <a:t>   - </a:t>
             </a:r>
             <a:r>
-              <a:rPr lang="ko-KR" altLang="en-US" sz="1400"/>
+              <a:rPr lang="ko-KR" altLang="en-US" sz="1300">
+                <a:latin typeface="+mn-ea"/>
+              </a:rPr>
               <a:t>업무 특성과 협업 빈도를 고려해 대표 부서 선정 </a:t>
             </a:r>
             <a:r>
-              <a:rPr lang="en-US" altLang="ko-KR" sz="1400"/>
+              <a:rPr lang="en-US" altLang="ko-KR" sz="1300">
+                <a:latin typeface="+mn-ea"/>
+              </a:rPr>
               <a:t>(10</a:t>
             </a:r>
             <a:r>
-              <a:rPr lang="ko-KR" altLang="en-US" sz="1400"/>
+              <a:rPr lang="ko-KR" altLang="en-US" sz="1300">
+                <a:latin typeface="+mn-ea"/>
+              </a:rPr>
               <a:t>개 → </a:t>
             </a:r>
             <a:r>
-              <a:rPr lang="en-US" altLang="ko-KR" sz="1400"/>
+              <a:rPr lang="en-US" altLang="ko-KR" sz="1300">
+                <a:latin typeface="+mn-ea"/>
+              </a:rPr>
               <a:t>20</a:t>
             </a:r>
             <a:r>
-              <a:rPr lang="ko-KR" altLang="en-US" sz="1400"/>
+              <a:rPr lang="ko-KR" altLang="en-US" sz="1300">
+                <a:latin typeface="+mn-ea"/>
+              </a:rPr>
               <a:t>개 → </a:t>
             </a:r>
             <a:r>
-              <a:rPr lang="en-US" altLang="ko-KR" sz="1400"/>
+              <a:rPr lang="en-US" altLang="ko-KR" sz="1300">
+                <a:latin typeface="+mn-ea"/>
+              </a:rPr>
               <a:t>35</a:t>
             </a:r>
             <a:r>
-              <a:rPr lang="ko-KR" altLang="en-US" sz="1400"/>
+              <a:rPr lang="ko-KR" altLang="en-US" sz="1300">
+                <a:latin typeface="+mn-ea"/>
+              </a:rPr>
               <a:t>개 부서로 확장</a:t>
             </a:r>
             <a:r>
-              <a:rPr lang="en-US" altLang="ko-KR" sz="1400"/>
+              <a:rPr lang="en-US" altLang="ko-KR" sz="1300">
+                <a:latin typeface="+mn-ea"/>
+              </a:rPr>
               <a:t>)</a:t>
             </a:r>
           </a:p>
@@ -6744,7 +6753,7 @@
               <a:defRPr/>
             </a:pPr>
             <a:r>
-              <a:rPr kumimoji="0" lang="en-US" altLang="ko-KR" sz="1300" b="0" i="0" u="none" strike="noStrike" kern="1200" cap="none" spc="-40" normalizeH="0" baseline="0" noProof="0">
+              <a:rPr kumimoji="0" lang="en-US" altLang="ko-KR" sz="1300" i="0" u="none" strike="noStrike" kern="1200" cap="none" spc="-40" normalizeH="0" baseline="0" noProof="0">
                 <a:ln>
                   <a:noFill/>
                 </a:ln>
@@ -6754,8 +6763,7 @@
                 <a:effectLst/>
                 <a:uLnTx/>
                 <a:uFillTx/>
-                <a:latin typeface="맑은 고딕"/>
-                <a:ea typeface="맑은 고딕" panose="020B0503020000020004" pitchFamily="50" charset="-127"/>
+                <a:latin typeface="+mn-ea"/>
                 <a:cs typeface="+mn-cs"/>
                 <a:sym typeface="Wingdings" pitchFamily="2" charset="2"/>
               </a:rPr>
@@ -6766,8 +6774,7 @@
                 <a:solidFill>
                   <a:prstClr val="black"/>
                 </a:solidFill>
-                <a:latin typeface="맑은 고딕"/>
-                <a:ea typeface="맑은 고딕" panose="020B0503020000020004" pitchFamily="50" charset="-127"/>
+                <a:latin typeface="+mn-ea"/>
                 <a:sym typeface="Wingdings" pitchFamily="2" charset="2"/>
               </a:rPr>
               <a:t>선정 부서의 업무 절차</a:t>
@@ -6777,8 +6784,7 @@
                 <a:solidFill>
                   <a:prstClr val="black"/>
                 </a:solidFill>
-                <a:latin typeface="맑은 고딕"/>
-                <a:ea typeface="맑은 고딕" panose="020B0503020000020004" pitchFamily="50" charset="-127"/>
+                <a:latin typeface="+mn-ea"/>
                 <a:sym typeface="Wingdings" pitchFamily="2" charset="2"/>
               </a:rPr>
               <a:t>, </a:t>
@@ -6788,8 +6794,7 @@
                 <a:solidFill>
                   <a:prstClr val="black"/>
                 </a:solidFill>
-                <a:latin typeface="맑은 고딕"/>
-                <a:ea typeface="맑은 고딕" panose="020B0503020000020004" pitchFamily="50" charset="-127"/>
+                <a:latin typeface="+mn-ea"/>
                 <a:sym typeface="Wingdings" pitchFamily="2" charset="2"/>
               </a:rPr>
               <a:t>관련 지침</a:t>
@@ -6799,8 +6804,7 @@
                 <a:solidFill>
                   <a:prstClr val="black"/>
                 </a:solidFill>
-                <a:latin typeface="맑은 고딕"/>
-                <a:ea typeface="맑은 고딕" panose="020B0503020000020004" pitchFamily="50" charset="-127"/>
+                <a:latin typeface="+mn-ea"/>
                 <a:sym typeface="Wingdings" pitchFamily="2" charset="2"/>
               </a:rPr>
               <a:t> </a:t>
@@ -6810,8 +6814,7 @@
                 <a:solidFill>
                   <a:prstClr val="black"/>
                 </a:solidFill>
-                <a:latin typeface="맑은 고딕"/>
-                <a:ea typeface="맑은 고딕" panose="020B0503020000020004" pitchFamily="50" charset="-127"/>
+                <a:latin typeface="+mn-ea"/>
                 <a:sym typeface="Wingdings" pitchFamily="2" charset="2"/>
               </a:rPr>
               <a:t>및 담당 조직 데이터 확보 </a:t>
@@ -6821,8 +6824,7 @@
                 <a:solidFill>
                   <a:prstClr val="black"/>
                 </a:solidFill>
-                <a:latin typeface="맑은 고딕"/>
-                <a:ea typeface="맑은 고딕" panose="020B0503020000020004" pitchFamily="50" charset="-127"/>
+                <a:latin typeface="+mn-ea"/>
                 <a:sym typeface="Wingdings" pitchFamily="2" charset="2"/>
               </a:rPr>
               <a:t>(P-GPT </a:t>
@@ -6832,8 +6834,7 @@
                 <a:solidFill>
                   <a:prstClr val="black"/>
                 </a:solidFill>
-                <a:latin typeface="맑은 고딕"/>
-                <a:ea typeface="맑은 고딕" panose="020B0503020000020004" pitchFamily="50" charset="-127"/>
+                <a:latin typeface="+mn-ea"/>
                 <a:sym typeface="Wingdings" pitchFamily="2" charset="2"/>
               </a:rPr>
               <a:t>활용 더미 데이터 생성</a:t>
@@ -6843,8 +6844,7 @@
                 <a:solidFill>
                   <a:prstClr val="black"/>
                 </a:solidFill>
-                <a:latin typeface="맑은 고딕"/>
-                <a:ea typeface="맑은 고딕" panose="020B0503020000020004" pitchFamily="50" charset="-127"/>
+                <a:latin typeface="+mn-ea"/>
                 <a:sym typeface="Wingdings" pitchFamily="2" charset="2"/>
               </a:rPr>
               <a:t>)</a:t>
@@ -7421,29 +7421,20 @@
               <a:rPr lang="ko-KR" altLang="en-US" sz="1300">
                 <a:latin typeface="+mn-ea"/>
               </a:rPr>
-              <a:t>그래프 등 </a:t>
-            </a:r>
-            <a:r>
-              <a:rPr lang="ko-KR" altLang="en-US" sz="1400">
-                <a:latin typeface="+mn-ea"/>
-              </a:rPr>
-              <a:t>교육내용 반영 </a:t>
-            </a:r>
-            <a:r>
-              <a:rPr lang="ko-KR" altLang="en-US" sz="1400"/>
-              <a:t>요구사항</a:t>
-            </a:r>
-            <a:r>
-              <a:rPr lang="en-US" altLang="ko-KR" sz="1400"/>
+              <a:t>그래프 등 교육내용 반영 요구사항</a:t>
+            </a:r>
+            <a:r>
+              <a:rPr lang="en-US" altLang="ko-KR" sz="1300">
+                <a:latin typeface="+mn-ea"/>
+              </a:rPr>
               <a:t>,</a:t>
             </a:r>
             <a:r>
-              <a:rPr lang="ko-KR" altLang="en-US" sz="1400"/>
+              <a:rPr lang="ko-KR" altLang="en-US" sz="1300">
+                <a:latin typeface="+mn-ea"/>
+              </a:rPr>
               <a:t> 구현 방향 지속 개선</a:t>
             </a:r>
-            <a:endParaRPr lang="ko-KR" altLang="en-US" sz="1300">
-              <a:latin typeface="+mn-ea"/>
-            </a:endParaRPr>
           </a:p>
         </p:txBody>
       </p:sp>
@@ -7548,7 +7539,7 @@
               <a:defRPr/>
             </a:pPr>
             <a:r>
-              <a:rPr kumimoji="0" lang="ko-KR" altLang="en-US" sz="1300" b="0" i="0" u="none" strike="noStrike" kern="1200" cap="none" spc="-40" normalizeH="0" baseline="0" noProof="0">
+              <a:rPr kumimoji="0" lang="ko-KR" altLang="en-US" sz="1300" i="0" u="none" strike="noStrike" kern="1200" cap="none" spc="-40" normalizeH="0" baseline="0" noProof="0">
                 <a:ln>
                   <a:noFill/>
                 </a:ln>
@@ -7558,23 +7549,23 @@
                 <a:effectLst/>
                 <a:uLnTx/>
                 <a:uFillTx/>
-                <a:latin typeface="맑은 고딕"/>
-                <a:ea typeface="맑은 고딕" panose="020B0503020000020004" pitchFamily="50" charset="-127"/>
+                <a:latin typeface="+mn-ea"/>
                 <a:cs typeface="+mn-cs"/>
                 <a:sym typeface="Wingdings" pitchFamily="2" charset="2"/>
               </a:rPr>
               <a:t>○ </a:t>
             </a:r>
             <a:r>
-              <a:rPr lang="ko-KR" altLang="en-US" sz="1400"/>
+              <a:rPr lang="ko-KR" altLang="en-US" sz="1300">
+                <a:latin typeface="+mn-ea"/>
+              </a:rPr>
               <a:t>여러 부서의 협업이 필요하거나 판단하기 까다로운 질의를 선별하여 서비스 안내 결과를 반복적으로 확인</a:t>
             </a:r>
             <a:endParaRPr lang="en-US" altLang="ko-KR" sz="1300" spc="-40">
               <a:solidFill>
                 <a:prstClr val="black"/>
               </a:solidFill>
-              <a:latin typeface="맑은 고딕"/>
-              <a:ea typeface="맑은 고딕" panose="020B0503020000020004" pitchFamily="50" charset="-127"/>
+              <a:latin typeface="+mn-ea"/>
               <a:sym typeface="Wingdings" pitchFamily="2" charset="2"/>
             </a:endParaRPr>
           </a:p>
@@ -7597,7 +7588,7 @@
               <a:defRPr/>
             </a:pPr>
             <a:r>
-              <a:rPr kumimoji="0" lang="en-US" altLang="ko-KR" sz="1300" b="1" i="0" u="none" strike="noStrike" kern="1200" cap="none" spc="-40" normalizeH="0" baseline="0" noProof="0">
+              <a:rPr kumimoji="0" lang="en-US" altLang="ko-KR" sz="1300" i="0" u="none" strike="noStrike" kern="1200" cap="none" spc="-40" normalizeH="0" baseline="0" noProof="0">
                 <a:ln>
                   <a:noFill/>
                 </a:ln>
@@ -7607,18 +7598,21 @@
                 <a:effectLst/>
                 <a:uLnTx/>
                 <a:uFillTx/>
-                <a:latin typeface="맑은 고딕"/>
-                <a:ea typeface="맑은 고딕" panose="020B0503020000020004" pitchFamily="50" charset="-127"/>
+                <a:latin typeface="+mn-ea"/>
                 <a:cs typeface="+mn-cs"/>
                 <a:sym typeface="Wingdings" pitchFamily="2" charset="2"/>
               </a:rPr>
               <a:t>   - </a:t>
             </a:r>
             <a:r>
-              <a:rPr lang="ko-KR" altLang="en-US" sz="1400"/>
+              <a:rPr lang="ko-KR" altLang="en-US" sz="1300">
+                <a:latin typeface="+mn-ea"/>
+              </a:rPr>
               <a:t>사용자가 실제로 질문할 만한 대표 질의 검토</a:t>
             </a:r>
-            <a:endParaRPr lang="en-US" altLang="ko-KR" sz="1400"/>
+            <a:endParaRPr lang="en-US" altLang="ko-KR" sz="1300">
+              <a:latin typeface="+mn-ea"/>
+            </a:endParaRPr>
           </a:p>
           <a:p>
             <a:pPr marL="0" marR="0" lvl="0" indent="0" algn="l" defTabSz="914400" rtl="0" eaLnBrk="1" fontAlgn="auto" latinLnBrk="1" hangingPunct="1">
@@ -7639,7 +7633,7 @@
               <a:defRPr/>
             </a:pPr>
             <a:r>
-              <a:rPr kumimoji="0" lang="en-US" altLang="ko-KR" sz="1300" b="0" i="0" u="none" strike="noStrike" kern="1200" cap="none" spc="-40" normalizeH="0" baseline="0" noProof="0">
+              <a:rPr kumimoji="0" lang="en-US" altLang="ko-KR" sz="1300" i="0" u="none" strike="noStrike" kern="1200" cap="none" spc="-40" normalizeH="0" baseline="0" noProof="0">
                 <a:ln>
                   <a:noFill/>
                 </a:ln>
@@ -7649,18 +7643,21 @@
                 <a:effectLst/>
                 <a:uLnTx/>
                 <a:uFillTx/>
-                <a:latin typeface="맑은 고딕"/>
-                <a:ea typeface="맑은 고딕" panose="020B0503020000020004" pitchFamily="50" charset="-127"/>
+                <a:latin typeface="+mn-ea"/>
                 <a:cs typeface="+mn-cs"/>
                 <a:sym typeface="Wingdings" pitchFamily="2" charset="2"/>
               </a:rPr>
               <a:t>   - </a:t>
             </a:r>
             <a:r>
-              <a:rPr lang="ko-KR" altLang="en-US" sz="1400"/>
+              <a:rPr lang="ko-KR" altLang="en-US" sz="1300">
+                <a:latin typeface="+mn-ea"/>
+              </a:rPr>
               <a:t>질의에 적합한 절차와 관련 지침이 제공되는지 확인</a:t>
             </a:r>
-            <a:endParaRPr lang="en-US" altLang="ko-KR" sz="1400"/>
+            <a:endParaRPr lang="en-US" altLang="ko-KR" sz="1300">
+              <a:latin typeface="+mn-ea"/>
+            </a:endParaRPr>
           </a:p>
           <a:p>
             <a:pPr marL="0" marR="0" lvl="0" indent="0" algn="l" defTabSz="914400" rtl="0" eaLnBrk="1" fontAlgn="auto" latinLnBrk="1" hangingPunct="1">
@@ -7681,42 +7678,50 @@
               <a:defRPr/>
             </a:pPr>
             <a:r>
-              <a:rPr lang="en-US" altLang="ko-KR" sz="1400" spc="-40">
+              <a:rPr lang="en-US" altLang="ko-KR" sz="1300" spc="-40">
                 <a:solidFill>
                   <a:prstClr val="black"/>
                 </a:solidFill>
-                <a:latin typeface="맑은 고딕"/>
-                <a:ea typeface="맑은 고딕" panose="020B0503020000020004" pitchFamily="50" charset="-127"/>
+                <a:latin typeface="+mn-ea"/>
                 <a:sym typeface="Wingdings" pitchFamily="2" charset="2"/>
               </a:rPr>
               <a:t>   - </a:t>
             </a:r>
             <a:r>
-              <a:rPr lang="ko-KR" altLang="en-US" sz="1400"/>
+              <a:rPr lang="ko-KR" altLang="en-US" sz="1300">
+                <a:latin typeface="+mn-ea"/>
+              </a:rPr>
               <a:t>질의</a:t>
             </a:r>
             <a:r>
-              <a:rPr lang="en-US" altLang="ko-KR" sz="1400"/>
+              <a:rPr lang="en-US" altLang="ko-KR" sz="1300">
+                <a:latin typeface="+mn-ea"/>
+              </a:rPr>
               <a:t>, </a:t>
             </a:r>
             <a:r>
-              <a:rPr lang="ko-KR" altLang="en-US" sz="1400"/>
+              <a:rPr lang="ko-KR" altLang="en-US" sz="1300">
+                <a:latin typeface="+mn-ea"/>
+              </a:rPr>
               <a:t>결과 확인</a:t>
             </a:r>
             <a:r>
-              <a:rPr lang="en-US" altLang="ko-KR" sz="1400"/>
+              <a:rPr lang="en-US" altLang="ko-KR" sz="1300">
+                <a:latin typeface="+mn-ea"/>
+              </a:rPr>
               <a:t>, </a:t>
             </a:r>
             <a:r>
-              <a:rPr lang="ko-KR" altLang="en-US" sz="1400"/>
+              <a:rPr lang="ko-KR" altLang="en-US" sz="1300">
+                <a:latin typeface="+mn-ea"/>
+              </a:rPr>
               <a:t>데이터 보완 과정을 반복하며 서비스 정확도 개선</a:t>
             </a:r>
             <a:endParaRPr lang="en-US" altLang="ko-KR" sz="1300" spc="-40">
               <a:solidFill>
                 <a:prstClr val="black"/>
               </a:solidFill>
-              <a:latin typeface="맑은 고딕"/>
-              <a:ea typeface="맑은 고딕" panose="020B0503020000020004" pitchFamily="50" charset="-127"/>
+              <a:latin typeface="+mn-ea"/>
               <a:sym typeface="Wingdings" pitchFamily="2" charset="2"/>
             </a:endParaRPr>
           </a:p>
@@ -7784,35 +7789,41 @@
                 <a:effectLst/>
                 <a:uLnTx/>
                 <a:uFillTx/>
-                <a:latin typeface="맑은 고딕"/>
-                <a:ea typeface="맑은 고딕" panose="020B0503020000020004" pitchFamily="50" charset="-127"/>
+                <a:latin typeface="+mn-ea"/>
                 <a:cs typeface="+mn-cs"/>
                 <a:sym typeface="Wingdings" pitchFamily="2" charset="2"/>
               </a:rPr>
               <a:t>○ </a:t>
             </a:r>
             <a:r>
-              <a:rPr lang="en-US" altLang="ko-KR" sz="1400"/>
+              <a:rPr lang="en-US" altLang="ko-KR" sz="1300">
+                <a:latin typeface="+mn-ea"/>
+              </a:rPr>
               <a:t>AI</a:t>
             </a:r>
             <a:r>
-              <a:rPr lang="ko-KR" altLang="en-US" sz="1400"/>
+              <a:rPr lang="ko-KR" altLang="en-US" sz="1300">
+                <a:latin typeface="+mn-ea"/>
+              </a:rPr>
               <a:t>와 웹서비스 개발에 대한 기초 단계에서 시작해</a:t>
             </a:r>
             <a:r>
-              <a:rPr lang="en-US" altLang="ko-KR" sz="1400"/>
+              <a:rPr lang="en-US" altLang="ko-KR" sz="1300">
+                <a:latin typeface="+mn-ea"/>
+              </a:rPr>
               <a:t>, </a:t>
             </a:r>
             <a:r>
-              <a:rPr lang="ko-KR" altLang="en-US" sz="1400"/>
+              <a:rPr lang="ko-KR" altLang="en-US" sz="1300">
+                <a:latin typeface="+mn-ea"/>
+              </a:rPr>
               <a:t>수업 내용과 코칭 피드백을 실제 서비스 구현에 단계적으로 적용</a:t>
             </a:r>
             <a:endParaRPr lang="en-US" altLang="ko-KR" sz="1300" spc="-40">
               <a:solidFill>
                 <a:prstClr val="black"/>
               </a:solidFill>
-              <a:latin typeface="맑은 고딕"/>
-              <a:ea typeface="맑은 고딕" panose="020B0503020000020004" pitchFamily="50" charset="-127"/>
+              <a:latin typeface="+mn-ea"/>
               <a:sym typeface="Wingdings" pitchFamily="2" charset="2"/>
             </a:endParaRPr>
           </a:p>
@@ -8288,7 +8299,7 @@
         <p:spPr>
           <a:xfrm>
             <a:off x="2242121" y="5931146"/>
-            <a:ext cx="5660908" cy="815608"/>
+            <a:ext cx="5660908" cy="769441"/>
           </a:xfrm>
           <a:prstGeom prst="rect">
             <a:avLst/>
@@ -8312,30 +8323,36 @@
               <a:rPr lang="en-US" altLang="ko-KR" sz="1300">
                 <a:latin typeface="+mn-ea"/>
               </a:rPr>
-              <a:t> </a:t>
-            </a:r>
-            <a:r>
-              <a:rPr lang="en-US" altLang="ko-KR" sz="1400"/>
-              <a:t>GitHub</a:t>
-            </a:r>
-            <a:r>
-              <a:rPr lang="ko-KR" altLang="en-US" sz="1400"/>
+              <a:t> GitHub</a:t>
+            </a:r>
+            <a:r>
+              <a:rPr lang="ko-KR" altLang="en-US" sz="1300">
+                <a:latin typeface="+mn-ea"/>
+              </a:rPr>
               <a:t>의 커밋</a:t>
             </a:r>
             <a:r>
-              <a:rPr lang="en-US" altLang="ko-KR" sz="1400"/>
+              <a:rPr lang="en-US" altLang="ko-KR" sz="1300">
+                <a:latin typeface="+mn-ea"/>
+              </a:rPr>
               <a:t>·</a:t>
             </a:r>
             <a:r>
-              <a:rPr lang="ko-KR" altLang="en-US" sz="1400"/>
+              <a:rPr lang="ko-KR" altLang="en-US" sz="1300">
+                <a:latin typeface="+mn-ea"/>
+              </a:rPr>
               <a:t>푸시</a:t>
             </a:r>
             <a:r>
-              <a:rPr lang="en-US" altLang="ko-KR" sz="1400"/>
+              <a:rPr lang="en-US" altLang="ko-KR" sz="1300">
+                <a:latin typeface="+mn-ea"/>
+              </a:rPr>
               <a:t>·</a:t>
             </a:r>
             <a:r>
-              <a:rPr lang="ko-KR" altLang="en-US" sz="1400"/>
+              <a:rPr lang="ko-KR" altLang="en-US" sz="1300">
+                <a:latin typeface="+mn-ea"/>
+              </a:rPr>
               <a:t>풀을 통한 변경사항 관리</a:t>
             </a:r>
             <a:endParaRPr lang="en-US" altLang="ko-KR" sz="1300">
@@ -8357,18 +8374,26 @@
               <a:t> </a:t>
             </a:r>
             <a:r>
-              <a:rPr lang="ko-KR" altLang="en-US" sz="1400"/>
+              <a:rPr lang="ko-KR" altLang="en-US" sz="1300">
+                <a:latin typeface="+mn-ea"/>
+              </a:rPr>
               <a:t>구현 오류와 </a:t>
             </a:r>
             <a:r>
-              <a:rPr lang="en-US" altLang="ko-KR" sz="1400"/>
+              <a:rPr lang="en-US" altLang="ko-KR" sz="1300">
+                <a:latin typeface="+mn-ea"/>
+              </a:rPr>
               <a:t>Git </a:t>
             </a:r>
             <a:r>
-              <a:rPr lang="ko-KR" altLang="en-US" sz="1400"/>
+              <a:rPr lang="ko-KR" altLang="en-US" sz="1300">
+                <a:latin typeface="+mn-ea"/>
+              </a:rPr>
               <a:t>사용의 어려움을 해결하며 </a:t>
             </a:r>
-            <a:endParaRPr lang="en-US" altLang="ko-KR" sz="1400"/>
+            <a:endParaRPr lang="en-US" altLang="ko-KR" sz="1300">
+              <a:latin typeface="+mn-ea"/>
+            </a:endParaRPr>
           </a:p>
           <a:p>
             <a:pPr>
@@ -8377,12 +8402,16 @@
               </a:spcBef>
             </a:pPr>
             <a:r>
-              <a:rPr lang="en-US" altLang="ko-KR" sz="1400"/>
-              <a:t>    </a:t>
-            </a:r>
-            <a:r>
-              <a:rPr lang="ko-KR" altLang="en-US" sz="1400"/>
-              <a:t>개발 방식과 개념 학습</a:t>
+              <a:rPr lang="en-US" altLang="ko-KR" sz="1300">
+                <a:latin typeface="+mn-ea"/>
+              </a:rPr>
+              <a:t>  </a:t>
+            </a:r>
+            <a:r>
+              <a:rPr lang="ko-KR" altLang="en-US" sz="1300">
+                <a:latin typeface="+mn-ea"/>
+              </a:rPr>
+              <a:t>웹개발 방식과 개념 학습</a:t>
             </a:r>
             <a:endParaRPr lang="en-US" altLang="ko-KR" sz="1300">
               <a:latin typeface="+mn-ea"/>
@@ -10007,13 +10036,15 @@
               </a:ext>
             </a:extLst>
           </p:cNvPr>
-          <p:cNvCxnSpPr/>
+          <p:cNvCxnSpPr>
+            <a:cxnSpLocks/>
+          </p:cNvCxnSpPr>
           <p:nvPr/>
         </p:nvCxnSpPr>
         <p:spPr>
           <a:xfrm>
             <a:off x="352511" y="4561113"/>
-            <a:ext cx="8855434" cy="0"/>
+            <a:ext cx="9299601" cy="0"/>
           </a:xfrm>
           <a:prstGeom prst="line">
             <a:avLst/>
@@ -10373,16 +10404,26 @@
           <a:lstStyle/>
           <a:p>
             <a:r>
+              <a:rPr lang="ko-KR" altLang="en-US" sz="1300" spc="-40">
+                <a:latin typeface="+mn-ea"/>
+              </a:rPr>
+              <a:t>대표 </a:t>
+            </a:r>
+            <a:r>
+              <a:rPr lang="en-US" altLang="ko-KR" sz="1300" spc="-40">
+                <a:latin typeface="+mn-ea"/>
+              </a:rPr>
+              <a:t>3~5</a:t>
+            </a:r>
+            <a:r>
+              <a:rPr lang="ko-KR" altLang="en-US" sz="1300" spc="-40">
+                <a:latin typeface="+mn-ea"/>
+              </a:rPr>
+              <a:t>개 </a:t>
+            </a:r>
+            <a:r>
               <a:rPr lang="ko-KR" altLang="en-US" sz="1300" spc="-40"/>
-              <a:t>대표 </a:t>
-            </a:r>
-            <a:r>
-              <a:rPr lang="en-US" altLang="ko-KR" sz="1300" spc="-40"/>
-              <a:t>3~5</a:t>
-            </a:r>
-            <a:r>
-              <a:rPr lang="ko-KR" altLang="en-US" sz="1300" spc="-40"/>
-              <a:t>개 부서의 업무 데이터 정비</a:t>
+              <a:t>부서의 업무 데이터 정비</a:t>
             </a:r>
             <a:endParaRPr lang="ko-KR" altLang="en-US" sz="1300" spc="-40">
               <a:solidFill>

--- a/.codex-output/2609_업무 지침 네비게이터_발표자료.pptx
+++ b/.codex-output/2609_업무 지침 네비게이터_발표자료.pptx
@@ -419,7 +419,7 @@
           <a:p>
             <a:fld id="{6AC0F0B2-DC44-4D7F-B9BC-23EB46679998}" type="datetimeFigureOut">
               <a:rPr lang="ko-KR" altLang="en-US" smtClean="0"/>
-              <a:t>2026-09-05</a:t>
+              <a:t>2026-09-06</a:t>
             </a:fld>
             <a:endParaRPr lang="ko-KR" altLang="en-US"/>
           </a:p>
@@ -589,7 +589,7 @@
           <a:p>
             <a:fld id="{6AC0F0B2-DC44-4D7F-B9BC-23EB46679998}" type="datetimeFigureOut">
               <a:rPr lang="ko-KR" altLang="en-US" smtClean="0"/>
-              <a:t>2026-09-05</a:t>
+              <a:t>2026-09-06</a:t>
             </a:fld>
             <a:endParaRPr lang="ko-KR" altLang="en-US"/>
           </a:p>
@@ -769,7 +769,7 @@
           <a:p>
             <a:fld id="{6AC0F0B2-DC44-4D7F-B9BC-23EB46679998}" type="datetimeFigureOut">
               <a:rPr lang="ko-KR" altLang="en-US" smtClean="0"/>
-              <a:t>2026-09-05</a:t>
+              <a:t>2026-09-06</a:t>
             </a:fld>
             <a:endParaRPr lang="ko-KR" altLang="en-US"/>
           </a:p>
@@ -939,7 +939,7 @@
           <a:p>
             <a:fld id="{6AC0F0B2-DC44-4D7F-B9BC-23EB46679998}" type="datetimeFigureOut">
               <a:rPr lang="ko-KR" altLang="en-US" smtClean="0"/>
-              <a:t>2026-09-05</a:t>
+              <a:t>2026-09-06</a:t>
             </a:fld>
             <a:endParaRPr lang="ko-KR" altLang="en-US"/>
           </a:p>
@@ -1183,7 +1183,7 @@
           <a:p>
             <a:fld id="{6AC0F0B2-DC44-4D7F-B9BC-23EB46679998}" type="datetimeFigureOut">
               <a:rPr lang="ko-KR" altLang="en-US" smtClean="0"/>
-              <a:t>2026-09-05</a:t>
+              <a:t>2026-09-06</a:t>
             </a:fld>
             <a:endParaRPr lang="ko-KR" altLang="en-US"/>
           </a:p>
@@ -1415,7 +1415,7 @@
           <a:p>
             <a:fld id="{6AC0F0B2-DC44-4D7F-B9BC-23EB46679998}" type="datetimeFigureOut">
               <a:rPr lang="ko-KR" altLang="en-US" smtClean="0"/>
-              <a:t>2026-09-05</a:t>
+              <a:t>2026-09-06</a:t>
             </a:fld>
             <a:endParaRPr lang="ko-KR" altLang="en-US"/>
           </a:p>
@@ -1782,7 +1782,7 @@
           <a:p>
             <a:fld id="{6AC0F0B2-DC44-4D7F-B9BC-23EB46679998}" type="datetimeFigureOut">
               <a:rPr lang="ko-KR" altLang="en-US" smtClean="0"/>
-              <a:t>2026-09-05</a:t>
+              <a:t>2026-09-06</a:t>
             </a:fld>
             <a:endParaRPr lang="ko-KR" altLang="en-US"/>
           </a:p>
@@ -1900,7 +1900,7 @@
           <a:p>
             <a:fld id="{6AC0F0B2-DC44-4D7F-B9BC-23EB46679998}" type="datetimeFigureOut">
               <a:rPr lang="ko-KR" altLang="en-US" smtClean="0"/>
-              <a:t>2026-09-05</a:t>
+              <a:t>2026-09-06</a:t>
             </a:fld>
             <a:endParaRPr lang="ko-KR" altLang="en-US"/>
           </a:p>
@@ -1995,7 +1995,7 @@
           <a:p>
             <a:fld id="{6AC0F0B2-DC44-4D7F-B9BC-23EB46679998}" type="datetimeFigureOut">
               <a:rPr lang="ko-KR" altLang="en-US" smtClean="0"/>
-              <a:t>2026-09-05</a:t>
+              <a:t>2026-09-06</a:t>
             </a:fld>
             <a:endParaRPr lang="ko-KR" altLang="en-US"/>
           </a:p>
@@ -2272,7 +2272,7 @@
           <a:p>
             <a:fld id="{6AC0F0B2-DC44-4D7F-B9BC-23EB46679998}" type="datetimeFigureOut">
               <a:rPr lang="ko-KR" altLang="en-US" smtClean="0"/>
-              <a:t>2026-09-05</a:t>
+              <a:t>2026-09-06</a:t>
             </a:fld>
             <a:endParaRPr lang="ko-KR" altLang="en-US"/>
           </a:p>
@@ -2529,7 +2529,7 @@
           <a:p>
             <a:fld id="{6AC0F0B2-DC44-4D7F-B9BC-23EB46679998}" type="datetimeFigureOut">
               <a:rPr lang="ko-KR" altLang="en-US" smtClean="0"/>
-              <a:t>2026-09-05</a:t>
+              <a:t>2026-09-06</a:t>
             </a:fld>
             <a:endParaRPr lang="ko-KR" altLang="en-US"/>
           </a:p>
@@ -2742,7 +2742,7 @@
           <a:p>
             <a:fld id="{6AC0F0B2-DC44-4D7F-B9BC-23EB46679998}" type="datetimeFigureOut">
               <a:rPr lang="ko-KR" altLang="en-US" smtClean="0"/>
-              <a:t>2026-09-05</a:t>
+              <a:t>2026-09-06</a:t>
             </a:fld>
             <a:endParaRPr lang="ko-KR" altLang="en-US"/>
           </a:p>
@@ -8074,7 +8074,7 @@
               <a:rPr lang="ko-KR" altLang="en-US" sz="1300">
                 <a:latin typeface="+mn-ea"/>
               </a:rPr>
-              <a:t>웹 서비스 구현</a:t>
+              <a:t>웹서비스 구현</a:t>
             </a:r>
             <a:endParaRPr lang="en-US" altLang="ko-KR" sz="1300">
               <a:latin typeface="+mn-ea"/>
@@ -9208,7 +9208,7 @@
         <p:spPr>
           <a:xfrm>
             <a:off x="4005942" y="1387835"/>
-            <a:ext cx="1524000" cy="406475"/>
+            <a:ext cx="1657198" cy="406475"/>
           </a:xfrm>
           <a:prstGeom prst="roundRect">
             <a:avLst/>
@@ -9242,7 +9242,15 @@
           <a:p>
             <a:pPr algn="ctr"/>
             <a:r>
-              <a:rPr lang="ko-KR" altLang="en-US" sz="1500" b="1"/>
+              <a:rPr lang="en-US" altLang="ko-KR" sz="1500" b="1">
+                <a:latin typeface="+mn-ea"/>
+              </a:rPr>
+              <a:t>1.</a:t>
+            </a:r>
+            <a:r>
+              <a:rPr lang="ko-KR" altLang="en-US" sz="1500" b="1">
+                <a:latin typeface="+mn-ea"/>
+              </a:rPr>
               <a:t>업무 입력</a:t>
             </a:r>
           </a:p>
@@ -9263,7 +9271,7 @@
         <p:spPr>
           <a:xfrm>
             <a:off x="4005942" y="2193378"/>
-            <a:ext cx="1524000" cy="406475"/>
+            <a:ext cx="1657198" cy="406475"/>
           </a:xfrm>
           <a:prstGeom prst="roundRect">
             <a:avLst/>
@@ -9297,19 +9305,16 @@
           <a:p>
             <a:pPr algn="ctr"/>
             <a:r>
-              <a:rPr lang="ko-KR" altLang="en-US" sz="1500" b="1"/>
-              <a:t>절차</a:t>
+              <a:rPr lang="en-US" altLang="ko-KR" sz="1500" b="1">
+                <a:latin typeface="+mn-ea"/>
+              </a:rPr>
+              <a:t>2.</a:t>
             </a:r>
             <a:r>
               <a:rPr lang="ko-KR" altLang="en-US" sz="1500" b="1">
-                <a:latin typeface="맑은 고딕" panose="020B0503020000020004" pitchFamily="50" charset="-127"/>
-                <a:ea typeface="맑은 고딕" panose="020B0503020000020004" pitchFamily="50" charset="-127"/>
-              </a:rPr>
-              <a:t>〮</a:t>
-            </a:r>
-            <a:r>
-              <a:rPr lang="ko-KR" altLang="en-US" sz="1500" b="1"/>
-              <a:t>부서 확인</a:t>
+                <a:latin typeface="+mn-ea"/>
+              </a:rPr>
+              <a:t>절차〮부서 확인</a:t>
             </a:r>
           </a:p>
         </p:txBody>
@@ -9328,8 +9333,8 @@
         </p:nvSpPr>
         <p:spPr>
           <a:xfrm>
-            <a:off x="4005942" y="3053973"/>
-            <a:ext cx="1524000" cy="406475"/>
+            <a:off x="4005941" y="3053973"/>
+            <a:ext cx="1657197" cy="406475"/>
           </a:xfrm>
           <a:prstGeom prst="roundRect">
             <a:avLst/>
@@ -9363,7 +9368,15 @@
           <a:p>
             <a:pPr algn="ctr"/>
             <a:r>
-              <a:rPr lang="ko-KR" altLang="en-US" sz="1500" b="1"/>
+              <a:rPr lang="en-US" altLang="ko-KR" sz="1500" b="1">
+                <a:latin typeface="+mn-ea"/>
+              </a:rPr>
+              <a:t>3.</a:t>
+            </a:r>
+            <a:r>
+              <a:rPr lang="ko-KR" altLang="en-US" sz="1500" b="1">
+                <a:latin typeface="+mn-ea"/>
+              </a:rPr>
               <a:t>협업 요청</a:t>
             </a:r>
           </a:p>
@@ -9438,7 +9451,7 @@
                   <a:schemeClr val="tx1"/>
                 </a:solidFill>
               </a:rPr>
-              <a:t>실제 업무 검증 바탕으로 안내 정확도와 사용성을 높이고</a:t>
+              <a:t>실제 업무 검증으로 웹서비스의 정확도와 사용성을 높이고</a:t>
             </a:r>
             <a:r>
               <a:rPr lang="en-US" altLang="ko-KR" sz="1500" b="1" spc="-40">
@@ -9609,7 +9622,7 @@
         </p:nvSpPr>
         <p:spPr>
           <a:xfrm>
-            <a:off x="5663140" y="1325615"/>
+            <a:off x="5713380" y="1325615"/>
             <a:ext cx="4513889" cy="530915"/>
           </a:xfrm>
           <a:prstGeom prst="rect">
@@ -9713,7 +9726,7 @@
         </p:nvSpPr>
         <p:spPr>
           <a:xfrm>
-            <a:off x="5663141" y="2131158"/>
+            <a:off x="5713381" y="2131158"/>
             <a:ext cx="4101344" cy="530915"/>
           </a:xfrm>
           <a:prstGeom prst="rect">
@@ -9826,7 +9839,7 @@
         </p:nvSpPr>
         <p:spPr>
           <a:xfrm>
-            <a:off x="5663141" y="2872490"/>
+            <a:off x="5713381" y="2872490"/>
             <a:ext cx="4101344" cy="769441"/>
           </a:xfrm>
           <a:prstGeom prst="rect">

--- a/.codex-output/2609_업무 지침 네비게이터_발표자료.pptx
+++ b/.codex-output/2609_업무 지침 네비게이터_발표자료.pptx
@@ -4020,7 +4020,7 @@
                 <a:ea typeface="맑은 고딕" panose="020B0503020000020004" pitchFamily="50" charset="-127"/>
                 <a:sym typeface="Wingdings" pitchFamily="2" charset="2"/>
               </a:rPr>
-              <a:t>현 황</a:t>
+              <a:t>현황</a:t>
             </a:r>
             <a:r>
               <a:rPr lang="en-US" altLang="ko-KR" sz="1300" spc="-40">
@@ -4155,7 +4155,7 @@
             </a:r>
             <a:r>
               <a:rPr lang="en-US" altLang="ko-KR" sz="1300" b="1"/>
-              <a:t>』</a:t>
+              <a:t>』 </a:t>
             </a:r>
             <a:r>
               <a:rPr lang="ko-KR" altLang="en-US" sz="1300" b="1"/>
@@ -4249,7 +4249,7 @@
                 <a:cs typeface="+mn-cs"/>
                 <a:sym typeface="Wingdings" pitchFamily="2" charset="2"/>
               </a:rPr>
-              <a:t>추진 방향 </a:t>
+              <a:t>추진 방향</a:t>
             </a:r>
             <a:r>
               <a:rPr kumimoji="0" lang="en-US" altLang="ko-KR" sz="1400" b="1" i="0" u="none" strike="noStrike" kern="1200" cap="none" spc="-20" normalizeH="0" baseline="0" noProof="0">
@@ -5707,7 +5707,7 @@
             </a:r>
             <a:r>
               <a:rPr lang="ko-KR" altLang="en-US" sz="1300"/>
-              <a:t>탐색시간 단축</a:t>
+              <a:t>탐색 시간 단축</a:t>
             </a:r>
             <a:r>
               <a:rPr lang="en-US" altLang="ko-KR" sz="1300"/>
@@ -6918,7 +6918,34 @@
                 <a:cs typeface="+mn-cs"/>
                 <a:sym typeface="Wingdings" pitchFamily="2" charset="2"/>
               </a:rPr>
-              <a:t>대표 질의 선정 → 검색 결과 확인 → 절차 및 지침 데이터 적정성 검토 → 데이터 보완  </a:t>
+              <a:t>대표 질의 선정 → </a:t>
+            </a:r>
+            <a:r>
+              <a:rPr lang="ko-KR" altLang="en-US" sz="1400" b="1" spc="-20">
+                <a:solidFill>
+                  <a:prstClr val="black"/>
+                </a:solidFill>
+                <a:latin typeface="+mn-ea"/>
+                <a:sym typeface="Wingdings" pitchFamily="2" charset="2"/>
+              </a:rPr>
+              <a:t>웹서비스 </a:t>
+            </a:r>
+            <a:r>
+              <a:rPr kumimoji="0" lang="ko-KR" altLang="en-US" sz="1400" b="1" i="0" u="none" strike="noStrike" kern="1200" cap="none" spc="-20" normalizeH="0" baseline="0" noProof="0">
+                <a:ln>
+                  <a:noFill/>
+                </a:ln>
+                <a:solidFill>
+                  <a:prstClr val="black"/>
+                </a:solidFill>
+                <a:effectLst/>
+                <a:uLnTx/>
+                <a:uFillTx/>
+                <a:latin typeface="+mn-ea"/>
+                <a:cs typeface="+mn-cs"/>
+                <a:sym typeface="Wingdings" pitchFamily="2" charset="2"/>
+              </a:rPr>
+              <a:t>검색 결과 검증 → 절차 및 지침 데이터 적정성 검토 → 데이터 보완  </a:t>
             </a:r>
             <a:endParaRPr kumimoji="0" lang="en-US" altLang="ko-KR" sz="1400" b="1" i="0" u="none" strike="noStrike" kern="1200" cap="none" spc="-20" normalizeH="0" baseline="0" noProof="0" dirty="0">
               <a:ln>
@@ -7094,8 +7121,8 @@
         </p:nvSpPr>
         <p:spPr>
           <a:xfrm>
-            <a:off x="556287" y="3606464"/>
-            <a:ext cx="5271758" cy="399999"/>
+            <a:off x="556286" y="3606464"/>
+            <a:ext cx="8085296" cy="406475"/>
           </a:xfrm>
           <a:prstGeom prst="rect">
             <a:avLst/>
@@ -7132,40 +7159,28 @@
               <a:defRPr/>
             </a:pPr>
             <a:r>
-              <a:rPr kumimoji="0" lang="en-US" altLang="ko-KR" sz="1400" b="1" i="0" u="none" strike="noStrike" kern="1200" cap="none" spc="-20" normalizeH="0" baseline="0" noProof="0">
-                <a:ln>
-                  <a:noFill/>
-                </a:ln>
-                <a:solidFill>
-                  <a:prstClr val="black"/>
-                </a:solidFill>
-                <a:effectLst/>
-                <a:uLnTx/>
-                <a:uFillTx/>
-                <a:latin typeface="맑은 고딕"/>
-                <a:ea typeface="맑은 고딕" panose="020B0503020000020004" pitchFamily="50" charset="-127"/>
-                <a:cs typeface="+mn-cs"/>
-                <a:sym typeface="Wingdings" pitchFamily="2" charset="2"/>
+              <a:rPr lang="en-US" altLang="ko-KR" sz="1400" b="1">
+                <a:latin typeface="+mn-ea"/>
               </a:rPr>
               <a:t>AI </a:t>
             </a:r>
             <a:r>
-              <a:rPr kumimoji="0" lang="ko-KR" altLang="en-US" sz="1400" b="1" i="0" u="none" strike="noStrike" kern="1200" cap="none" spc="-20" normalizeH="0" baseline="0" noProof="0">
-                <a:ln>
-                  <a:noFill/>
-                </a:ln>
-                <a:solidFill>
-                  <a:prstClr val="black"/>
-                </a:solidFill>
-                <a:effectLst/>
-                <a:uLnTx/>
-                <a:uFillTx/>
-                <a:latin typeface="맑은 고딕"/>
-                <a:ea typeface="맑은 고딕" panose="020B0503020000020004" pitchFamily="50" charset="-127"/>
-                <a:cs typeface="+mn-cs"/>
-                <a:sym typeface="Wingdings" pitchFamily="2" charset="2"/>
-              </a:rPr>
-              <a:t>활용 전문가 교육과 코칭 적용한 웹서비스 개발 </a:t>
+              <a:rPr lang="ko-KR" altLang="en-US" sz="1400" b="1">
+                <a:latin typeface="+mn-ea"/>
+              </a:rPr>
+              <a:t>활용 교육과 코칭을 바탕으로</a:t>
+            </a:r>
+            <a:r>
+              <a:rPr lang="en-US" altLang="ko-KR" sz="1400" b="1">
+                <a:latin typeface="+mn-ea"/>
+              </a:rPr>
+              <a:t>, </a:t>
+            </a:r>
+            <a:r>
+              <a:rPr lang="ko-KR" altLang="en-US" sz="1400" b="1">
+                <a:latin typeface="+mn-ea"/>
+              </a:rPr>
+              <a:t>문제를 해결하며 구현한 웹서비스</a:t>
             </a:r>
             <a:endParaRPr kumimoji="0" lang="en-US" altLang="ko-KR" sz="1400" b="1" i="0" u="none" strike="noStrike" kern="1200" cap="none" spc="-20" normalizeH="0" baseline="0" noProof="0" dirty="0">
               <a:ln>
@@ -7177,8 +7192,7 @@
               <a:effectLst/>
               <a:uLnTx/>
               <a:uFillTx/>
-              <a:latin typeface="맑은 고딕"/>
-              <a:ea typeface="맑은 고딕" panose="020B0503020000020004" pitchFamily="50" charset="-127"/>
+              <a:latin typeface="+mn-ea"/>
               <a:cs typeface="+mn-cs"/>
               <a:sym typeface="Wingdings" pitchFamily="2" charset="2"/>
             </a:endParaRPr>
@@ -7343,7 +7357,7 @@
         <p:spPr>
           <a:xfrm>
             <a:off x="2219662" y="4424187"/>
-            <a:ext cx="4986678" cy="546303"/>
+            <a:ext cx="4986678" cy="530915"/>
           </a:xfrm>
           <a:prstGeom prst="rect">
             <a:avLst/>
@@ -7364,42 +7378,30 @@
               <a:buChar char="§"/>
             </a:pPr>
             <a:r>
-              <a:rPr lang="en-US" altLang="ko-KR" sz="1300">
+              <a:rPr lang="en-US" altLang="ko-KR" sz="1300" spc="-40">
                 <a:latin typeface="+mn-ea"/>
               </a:rPr>
               <a:t> PRD.md </a:t>
             </a:r>
             <a:r>
-              <a:rPr lang="ko-KR" altLang="en-US" sz="1300">
-                <a:latin typeface="+mn-ea"/>
-              </a:rPr>
-              <a:t>초안 작성</a:t>
-            </a:r>
-            <a:r>
-              <a:rPr lang="en-US" altLang="ko-KR" sz="1300">
-                <a:latin typeface="+mn-ea"/>
-              </a:rPr>
-              <a:t>, </a:t>
-            </a:r>
-            <a:r>
-              <a:rPr lang="ko-KR" altLang="en-US" sz="1300">
-                <a:latin typeface="+mn-ea"/>
-              </a:rPr>
-              <a:t>데이터 보완과 기능 정의</a:t>
-            </a:r>
-            <a:r>
-              <a:rPr lang="en-US" altLang="ko-KR" sz="1300">
-                <a:latin typeface="+mn-ea"/>
-              </a:rPr>
-              <a:t> update</a:t>
-            </a:r>
-            <a:r>
-              <a:rPr lang="ko-KR" altLang="en-US" sz="1300">
-                <a:latin typeface="+mn-ea"/>
-              </a:rPr>
-              <a:t> </a:t>
-            </a:r>
-            <a:endParaRPr lang="en-US" altLang="ko-KR" sz="1300">
+              <a:rPr lang="ko-KR" altLang="en-US" sz="1300" spc="-40">
+                <a:latin typeface="+mn-ea"/>
+              </a:rPr>
+              <a:t>초안 작성 후 데이터 보완</a:t>
+            </a:r>
+            <a:r>
+              <a:rPr lang="en-US" altLang="ko-KR" sz="1300" spc="-40">
+                <a:latin typeface="+mn-ea"/>
+              </a:rPr>
+              <a:t>,</a:t>
+            </a:r>
+            <a:r>
+              <a:rPr lang="ko-KR" altLang="en-US" sz="1300" spc="-40">
+                <a:latin typeface="+mn-ea"/>
+              </a:rPr>
+              <a:t> 기능 정의 지속 업데이트</a:t>
+            </a:r>
+            <a:endParaRPr lang="en-US" altLang="ko-KR" sz="1300" spc="-40">
               <a:latin typeface="+mn-ea"/>
             </a:endParaRPr>
           </a:p>
@@ -7412,28 +7414,16 @@
               <a:buChar char="§"/>
             </a:pPr>
             <a:r>
-              <a:rPr lang="en-US" altLang="ko-KR" sz="1300">
+              <a:rPr lang="en-US" altLang="ko-KR" sz="1300" spc="-40">
                 <a:latin typeface="+mn-ea"/>
               </a:rPr>
               <a:t> </a:t>
             </a:r>
             <a:r>
-              <a:rPr lang="ko-KR" altLang="en-US" sz="1300">
-                <a:latin typeface="+mn-ea"/>
-              </a:rPr>
-              <a:t>그래프 등 교육내용 반영 요구사항</a:t>
-            </a:r>
-            <a:r>
-              <a:rPr lang="en-US" altLang="ko-KR" sz="1300">
-                <a:latin typeface="+mn-ea"/>
-              </a:rPr>
-              <a:t>,</a:t>
-            </a:r>
-            <a:r>
-              <a:rPr lang="ko-KR" altLang="en-US" sz="1300">
-                <a:latin typeface="+mn-ea"/>
-              </a:rPr>
-              <a:t> 구현 방향 지속 개선</a:t>
+              <a:rPr lang="ko-KR" altLang="en-US" sz="1300" spc="-40">
+                <a:latin typeface="+mn-ea"/>
+              </a:rPr>
+              <a:t>그래프 등 교육내용을 반영해 요구사항과 구현 방향 지속 개선</a:t>
             </a:r>
           </a:p>
         </p:txBody>
@@ -7796,28 +7786,73 @@
               <a:t>○ </a:t>
             </a:r>
             <a:r>
+              <a:rPr kumimoji="0" lang="en-US" altLang="ko-KR" sz="1300" b="0" i="0" u="none" strike="noStrike" kern="1200" cap="none" spc="-40" normalizeH="0" baseline="0" noProof="0">
+                <a:ln>
+                  <a:noFill/>
+                </a:ln>
+                <a:solidFill>
+                  <a:prstClr val="black"/>
+                </a:solidFill>
+                <a:effectLst/>
+                <a:uLnTx/>
+                <a:uFillTx/>
+                <a:latin typeface="+mn-ea"/>
+                <a:cs typeface="+mn-cs"/>
+                <a:sym typeface="Wingdings" pitchFamily="2" charset="2"/>
+              </a:rPr>
+              <a:t>PRD </a:t>
+            </a:r>
+            <a:r>
+              <a:rPr kumimoji="0" lang="ko-KR" altLang="en-US" sz="1300" b="0" i="0" u="none" strike="noStrike" kern="1200" cap="none" spc="-40" normalizeH="0" baseline="0" noProof="0">
+                <a:ln>
+                  <a:noFill/>
+                </a:ln>
+                <a:solidFill>
+                  <a:prstClr val="black"/>
+                </a:solidFill>
+                <a:effectLst/>
+                <a:uLnTx/>
+                <a:uFillTx/>
+                <a:latin typeface="+mn-ea"/>
+                <a:cs typeface="+mn-cs"/>
+                <a:sym typeface="Wingdings" pitchFamily="2" charset="2"/>
+              </a:rPr>
+              <a:t>작성</a:t>
+            </a:r>
+            <a:r>
+              <a:rPr kumimoji="0" lang="en-US" altLang="ko-KR" sz="1300" b="0" i="0" u="none" strike="noStrike" kern="1200" cap="none" spc="-40" normalizeH="0" baseline="0" noProof="0">
+                <a:ln>
+                  <a:noFill/>
+                </a:ln>
+                <a:solidFill>
+                  <a:prstClr val="black"/>
+                </a:solidFill>
+                <a:effectLst/>
+                <a:uLnTx/>
+                <a:uFillTx/>
+                <a:latin typeface="+mn-ea"/>
+                <a:cs typeface="+mn-cs"/>
+                <a:sym typeface="Wingdings" pitchFamily="2" charset="2"/>
+              </a:rPr>
+              <a:t>, </a:t>
+            </a:r>
+            <a:r>
+              <a:rPr lang="ko-KR" altLang="en-US" sz="1300">
+                <a:latin typeface="+mn-ea"/>
+              </a:rPr>
+              <a:t>기능 구현</a:t>
+            </a:r>
+            <a:r>
               <a:rPr lang="en-US" altLang="ko-KR" sz="1300">
                 <a:latin typeface="+mn-ea"/>
               </a:rPr>
-              <a:t>AI</a:t>
+              <a:t>, </a:t>
             </a:r>
             <a:r>
               <a:rPr lang="ko-KR" altLang="en-US" sz="1300">
                 <a:latin typeface="+mn-ea"/>
               </a:rPr>
-              <a:t>와 웹서비스 개발에 대한 기초 단계에서 시작해</a:t>
-            </a:r>
-            <a:r>
-              <a:rPr lang="en-US" altLang="ko-KR" sz="1300">
-                <a:latin typeface="+mn-ea"/>
-              </a:rPr>
-              <a:t>, </a:t>
-            </a:r>
-            <a:r>
-              <a:rPr lang="ko-KR" altLang="en-US" sz="1300">
-                <a:latin typeface="+mn-ea"/>
-              </a:rPr>
-              <a:t>수업 내용과 코칭 피드백을 실제 서비스 구현에 단계적으로 적용</a:t>
+              <a:t>변경 이력 관리와 오류 해결을 반복하며 실제 웹서비스 개발 과정을 경험</a:t>
             </a:r>
             <a:endParaRPr lang="en-US" altLang="ko-KR" sz="1300" spc="-40">
               <a:solidFill>
@@ -7925,7 +7960,7 @@
         </p:blipFill>
         <p:spPr>
           <a:xfrm>
-            <a:off x="6970322" y="4401716"/>
+            <a:off x="6930133" y="4401716"/>
             <a:ext cx="1350499" cy="808874"/>
           </a:xfrm>
           <a:prstGeom prst="rect">
@@ -7969,54 +8004,54 @@
               <a:buChar char="§"/>
             </a:pPr>
             <a:r>
-              <a:rPr lang="en-US" altLang="ko-KR" sz="1300">
+              <a:rPr lang="en-US" altLang="ko-KR" sz="1300" spc="-40">
                 <a:latin typeface="+mn-ea"/>
               </a:rPr>
               <a:t> VS</a:t>
             </a:r>
             <a:r>
-              <a:rPr lang="ko-KR" altLang="en-US" sz="1300">
+              <a:rPr lang="ko-KR" altLang="en-US" sz="1300" spc="-40">
                 <a:latin typeface="+mn-ea"/>
               </a:rPr>
               <a:t> </a:t>
             </a:r>
             <a:r>
-              <a:rPr lang="en-US" altLang="ko-KR" sz="1300">
+              <a:rPr lang="en-US" altLang="ko-KR" sz="1300" spc="-40">
                 <a:latin typeface="+mn-ea"/>
               </a:rPr>
               <a:t>Code</a:t>
             </a:r>
             <a:r>
-              <a:rPr lang="ko-KR" altLang="en-US" sz="1300">
-                <a:latin typeface="+mn-ea"/>
-              </a:rPr>
-              <a:t> 가상환경</a:t>
-            </a:r>
-            <a:r>
-              <a:rPr lang="en-US" altLang="ko-KR" sz="1300">
+              <a:rPr lang="ko-KR" altLang="en-US" sz="1300" spc="-40">
+                <a:latin typeface="+mn-ea"/>
+              </a:rPr>
+              <a:t>에서 가상환경</a:t>
+            </a:r>
+            <a:r>
+              <a:rPr lang="en-US" altLang="ko-KR" sz="1300" spc="-40">
                 <a:latin typeface="+mn-ea"/>
               </a:rPr>
               <a:t>, </a:t>
             </a:r>
             <a:r>
-              <a:rPr lang="ko-KR" altLang="en-US" sz="1300">
+              <a:rPr lang="ko-KR" altLang="en-US" sz="1300" spc="-40">
                 <a:latin typeface="+mn-ea"/>
               </a:rPr>
               <a:t>환경변수</a:t>
             </a:r>
             <a:r>
-              <a:rPr lang="en-US" altLang="ko-KR" sz="1300">
+              <a:rPr lang="en-US" altLang="ko-KR" sz="1300" spc="-40">
                 <a:latin typeface="+mn-ea"/>
               </a:rPr>
               <a:t>(.env) </a:t>
             </a:r>
             <a:r>
-              <a:rPr lang="ko-KR" altLang="en-US" sz="1300">
-                <a:latin typeface="+mn-ea"/>
-              </a:rPr>
-              <a:t>활용</a:t>
-            </a:r>
-            <a:endParaRPr lang="en-US" altLang="ko-KR" sz="1300">
+              <a:rPr lang="ko-KR" altLang="en-US" sz="1300" spc="-40">
+                <a:latin typeface="+mn-ea"/>
+              </a:rPr>
+              <a:t>반영 개발</a:t>
+            </a:r>
+            <a:endParaRPr lang="en-US" altLang="ko-KR" sz="1300" spc="-40">
               <a:latin typeface="+mn-ea"/>
             </a:endParaRPr>
           </a:p>
@@ -8029,54 +8064,42 @@
               <a:buChar char="§"/>
             </a:pPr>
             <a:r>
-              <a:rPr lang="en-US" altLang="ko-KR" sz="1300">
+              <a:rPr lang="en-US" altLang="ko-KR" sz="1300" spc="-40">
                 <a:latin typeface="+mn-ea"/>
               </a:rPr>
               <a:t> </a:t>
             </a:r>
             <a:r>
-              <a:rPr lang="ko-KR" altLang="en-US" sz="1300">
-                <a:latin typeface="+mn-ea"/>
-              </a:rPr>
-              <a:t>라이브러리</a:t>
-            </a:r>
-            <a:r>
-              <a:rPr lang="en-US" altLang="ko-KR" sz="1300">
+              <a:rPr lang="ko-KR" altLang="en-US" sz="1300" spc="-40">
+                <a:latin typeface="+mn-ea"/>
+              </a:rPr>
+              <a:t>라이브러리와 </a:t>
+            </a:r>
+            <a:r>
+              <a:rPr lang="en-US" altLang="ko-KR" sz="1300" spc="-40">
+                <a:latin typeface="+mn-ea"/>
+              </a:rPr>
+              <a:t>AI </a:t>
+            </a:r>
+            <a:r>
+              <a:rPr lang="ko-KR" altLang="en-US" sz="1300" spc="-40">
+                <a:latin typeface="+mn-ea"/>
+              </a:rPr>
+              <a:t>도구를 활용해</a:t>
+            </a:r>
+            <a:r>
+              <a:rPr lang="en-US" altLang="ko-KR" sz="1300" spc="-40">
                 <a:latin typeface="+mn-ea"/>
               </a:rPr>
               <a:t>, </a:t>
             </a:r>
             <a:r>
-              <a:rPr lang="ko-KR" altLang="en-US" sz="1300">
-                <a:latin typeface="+mn-ea"/>
-              </a:rPr>
-              <a:t>스킬</a:t>
-            </a:r>
-            <a:r>
-              <a:rPr lang="en-US" altLang="ko-KR" sz="1300">
-                <a:latin typeface="+mn-ea"/>
-              </a:rPr>
-              <a:t>, </a:t>
-            </a:r>
-            <a:r>
-              <a:rPr lang="ko-KR" altLang="en-US" sz="1300">
-                <a:latin typeface="+mn-ea"/>
-              </a:rPr>
-              <a:t>메일링 기능 적용</a:t>
-            </a:r>
-            <a:r>
-              <a:rPr lang="en-US" altLang="ko-KR" sz="1300">
-                <a:latin typeface="+mn-ea"/>
-              </a:rPr>
-              <a:t> </a:t>
-            </a:r>
-            <a:r>
-              <a:rPr lang="ko-KR" altLang="en-US" sz="1300">
-                <a:latin typeface="+mn-ea"/>
-              </a:rPr>
-              <a:t>웹서비스 구현</a:t>
-            </a:r>
-            <a:endParaRPr lang="en-US" altLang="ko-KR" sz="1300">
+              <a:rPr lang="ko-KR" altLang="en-US" sz="1300" spc="-40">
+                <a:latin typeface="+mn-ea"/>
+              </a:rPr>
+              <a:t>메일링 등 기능 확장</a:t>
+            </a:r>
+            <a:endParaRPr lang="en-US" altLang="ko-KR" sz="1300" spc="-40">
               <a:latin typeface="+mn-ea"/>
             </a:endParaRPr>
           </a:p>
@@ -8174,7 +8197,7 @@
         </p:blipFill>
         <p:spPr>
           <a:xfrm>
-            <a:off x="6869845" y="5568813"/>
+            <a:off x="6930133" y="5568813"/>
             <a:ext cx="2950029" cy="1138218"/>
           </a:xfrm>
           <a:prstGeom prst="rect">
@@ -8232,7 +8255,7 @@
         </p:blipFill>
         <p:spPr>
           <a:xfrm>
-            <a:off x="622348" y="6031717"/>
+            <a:off x="622348" y="5991525"/>
             <a:ext cx="602832" cy="611567"/>
           </a:xfrm>
           <a:prstGeom prst="rect">
@@ -8256,7 +8279,7 @@
         </p:nvSpPr>
         <p:spPr>
           <a:xfrm>
-            <a:off x="556286" y="6019397"/>
+            <a:off x="556286" y="5979205"/>
             <a:ext cx="1600429" cy="639107"/>
           </a:xfrm>
           <a:prstGeom prst="roundRect">
@@ -8298,8 +8321,8 @@
         </p:nvSpPr>
         <p:spPr>
           <a:xfrm>
-            <a:off x="2242121" y="5931146"/>
-            <a:ext cx="5660908" cy="769441"/>
+            <a:off x="2242121" y="5941194"/>
+            <a:ext cx="4728201" cy="784830"/>
           </a:xfrm>
           <a:prstGeom prst="rect">
             <a:avLst/>
@@ -8320,42 +8343,30 @@
               <a:buChar char="§"/>
             </a:pPr>
             <a:r>
-              <a:rPr lang="en-US" altLang="ko-KR" sz="1300">
-                <a:latin typeface="+mn-ea"/>
-              </a:rPr>
-              <a:t> GitHub</a:t>
-            </a:r>
-            <a:r>
-              <a:rPr lang="ko-KR" altLang="en-US" sz="1300">
-                <a:latin typeface="+mn-ea"/>
-              </a:rPr>
-              <a:t>의 커밋</a:t>
-            </a:r>
-            <a:r>
-              <a:rPr lang="en-US" altLang="ko-KR" sz="1300">
-                <a:latin typeface="+mn-ea"/>
-              </a:rPr>
-              <a:t>·</a:t>
-            </a:r>
-            <a:r>
-              <a:rPr lang="ko-KR" altLang="en-US" sz="1300">
-                <a:latin typeface="+mn-ea"/>
-              </a:rPr>
-              <a:t>푸시</a:t>
-            </a:r>
-            <a:r>
-              <a:rPr lang="en-US" altLang="ko-KR" sz="1300">
-                <a:latin typeface="+mn-ea"/>
-              </a:rPr>
-              <a:t>·</a:t>
-            </a:r>
-            <a:r>
-              <a:rPr lang="ko-KR" altLang="en-US" sz="1300">
-                <a:latin typeface="+mn-ea"/>
-              </a:rPr>
-              <a:t>풀을 통한 변경사항 관리</a:t>
-            </a:r>
-            <a:endParaRPr lang="en-US" altLang="ko-KR" sz="1300">
+              <a:rPr lang="en-US" altLang="ko-KR" sz="1300" spc="-40">
+                <a:latin typeface="+mn-ea"/>
+              </a:rPr>
+              <a:t> Git</a:t>
+            </a:r>
+            <a:r>
+              <a:rPr lang="ko-KR" altLang="en-US" sz="1300" spc="-40">
+                <a:latin typeface="+mn-ea"/>
+              </a:rPr>
+              <a:t>과 </a:t>
+            </a:r>
+            <a:r>
+              <a:rPr lang="en-US" altLang="ko-KR" sz="1300" spc="-40">
+                <a:latin typeface="+mn-ea"/>
+              </a:rPr>
+              <a:t>GitHub</a:t>
+            </a:r>
+            <a:r>
+              <a:rPr lang="ko-KR" altLang="en-US" sz="1300" spc="-40">
+                <a:latin typeface="+mn-ea"/>
+              </a:rPr>
+              <a:t>를 활용해 변경사항과 개발 이력 관리</a:t>
+            </a:r>
+            <a:endParaRPr lang="en-US" altLang="ko-KR" sz="1300" spc="-40">
               <a:latin typeface="+mn-ea"/>
             </a:endParaRPr>
           </a:p>
@@ -8368,30 +8379,30 @@
               <a:buChar char="§"/>
             </a:pPr>
             <a:r>
-              <a:rPr lang="en-US" altLang="ko-KR" sz="1300">
+              <a:rPr lang="en-US" altLang="ko-KR" sz="1300" spc="-40">
                 <a:latin typeface="+mn-ea"/>
               </a:rPr>
               <a:t> </a:t>
             </a:r>
             <a:r>
-              <a:rPr lang="ko-KR" altLang="en-US" sz="1300">
+              <a:rPr lang="ko-KR" altLang="en-US" sz="1300" spc="-40">
                 <a:latin typeface="+mn-ea"/>
               </a:rPr>
               <a:t>구현 오류와 </a:t>
             </a:r>
             <a:r>
-              <a:rPr lang="en-US" altLang="ko-KR" sz="1300">
+              <a:rPr lang="en-US" altLang="ko-KR" sz="1300" spc="-40">
                 <a:latin typeface="+mn-ea"/>
               </a:rPr>
               <a:t>Git </a:t>
             </a:r>
             <a:r>
-              <a:rPr lang="ko-KR" altLang="en-US" sz="1300">
+              <a:rPr lang="ko-KR" altLang="en-US" sz="1300" spc="-40">
                 <a:latin typeface="+mn-ea"/>
               </a:rPr>
               <a:t>사용의 어려움을 해결하며 </a:t>
             </a:r>
-            <a:endParaRPr lang="en-US" altLang="ko-KR" sz="1300">
+            <a:endParaRPr lang="en-US" altLang="ko-KR" sz="1300" spc="-40">
               <a:latin typeface="+mn-ea"/>
             </a:endParaRPr>
           </a:p>
@@ -8402,18 +8413,18 @@
               </a:spcBef>
             </a:pPr>
             <a:r>
-              <a:rPr lang="en-US" altLang="ko-KR" sz="1300">
+              <a:rPr lang="en-US" altLang="ko-KR" sz="1300" spc="-40">
                 <a:latin typeface="+mn-ea"/>
               </a:rPr>
               <a:t>  </a:t>
             </a:r>
             <a:r>
-              <a:rPr lang="ko-KR" altLang="en-US" sz="1300">
+              <a:rPr lang="ko-KR" altLang="en-US" sz="1300" spc="-40">
                 <a:latin typeface="+mn-ea"/>
               </a:rPr>
               <a:t>웹개발 방식과 개념 학습</a:t>
             </a:r>
-            <a:endParaRPr lang="en-US" altLang="ko-KR" sz="1300">
+            <a:endParaRPr lang="en-US" altLang="ko-KR" sz="1300" spc="-40">
               <a:latin typeface="+mn-ea"/>
             </a:endParaRPr>
           </a:p>
@@ -8435,7 +8446,7 @@
         </p:nvCxnSpPr>
         <p:spPr>
           <a:xfrm flipV="1">
-            <a:off x="2261449" y="5065319"/>
+            <a:off x="2261449" y="5055271"/>
             <a:ext cx="4100053" cy="53806"/>
           </a:xfrm>
           <a:prstGeom prst="line">
@@ -8890,7 +8901,7 @@
         </p:nvSpPr>
         <p:spPr>
           <a:xfrm>
-            <a:off x="556286" y="3794935"/>
+            <a:off x="556286" y="3764791"/>
             <a:ext cx="9034370" cy="406475"/>
           </a:xfrm>
           <a:prstGeom prst="rect">
@@ -8936,7 +8947,18 @@
                 <a:ea typeface="맑은 고딕" panose="020B0503020000020004" pitchFamily="50" charset="-127"/>
                 <a:sym typeface="Wingdings" pitchFamily="2" charset="2"/>
               </a:rPr>
-              <a:t>향후 계획 </a:t>
+              <a:t>향후 계획</a:t>
+            </a:r>
+            <a:r>
+              <a:rPr lang="en-US" altLang="ko-KR" sz="1400" b="1" spc="-20">
+                <a:solidFill>
+                  <a:prstClr val="black"/>
+                </a:solidFill>
+                <a:latin typeface="맑은 고딕"/>
+                <a:ea typeface="맑은 고딕" panose="020B0503020000020004" pitchFamily="50" charset="-127"/>
+                <a:sym typeface="Wingdings" pitchFamily="2" charset="2"/>
+              </a:rPr>
+              <a:t>:</a:t>
             </a:r>
             <a:r>
               <a:rPr lang="en-US" altLang="ko-KR" sz="1400" spc="-20">
@@ -8947,7 +8969,7 @@
                 <a:ea typeface="맑은 고딕" panose="020B0503020000020004" pitchFamily="50" charset="-127"/>
                 <a:sym typeface="Wingdings" pitchFamily="2" charset="2"/>
               </a:rPr>
-              <a:t>: </a:t>
+              <a:t> </a:t>
             </a:r>
             <a:r>
               <a:rPr lang="ko-KR" altLang="en-US" sz="1400"/>
@@ -8985,7 +9007,7 @@
         </p:nvGrpSpPr>
         <p:grpSpPr>
           <a:xfrm>
-            <a:off x="310399" y="3904924"/>
+            <a:off x="310399" y="3874780"/>
             <a:ext cx="194324" cy="180020"/>
             <a:chOff x="416496" y="3577457"/>
             <a:chExt cx="194324" cy="180020"/>
@@ -9163,36 +9185,6 @@
           </a:p>
         </p:txBody>
       </p:sp>
-      <p:pic>
-        <p:nvPicPr>
-          <p:cNvPr id="12" name="그림 11">
-            <a:extLst>
-              <a:ext uri="{FF2B5EF4-FFF2-40B4-BE49-F238E27FC236}">
-                <a16:creationId xmlns:a16="http://schemas.microsoft.com/office/drawing/2014/main" id="{16462F13-77A2-4AF8-B2DD-849D31D1CBE9}"/>
-              </a:ext>
-            </a:extLst>
-          </p:cNvPr>
-          <p:cNvPicPr>
-            <a:picLocks noChangeAspect="1"/>
-          </p:cNvPicPr>
-          <p:nvPr/>
-        </p:nvPicPr>
-        <p:blipFill>
-          <a:blip r:embed="rId3"/>
-          <a:stretch>
-            <a:fillRect/>
-          </a:stretch>
-        </p:blipFill>
-        <p:spPr>
-          <a:xfrm>
-            <a:off x="597292" y="1198401"/>
-            <a:ext cx="2918794" cy="2324010"/>
-          </a:xfrm>
-          <a:prstGeom prst="rect">
-            <a:avLst/>
-          </a:prstGeom>
-        </p:spPr>
-      </p:pic>
       <p:sp>
         <p:nvSpPr>
           <p:cNvPr id="13" name="사각형: 둥근 모서리 12">
@@ -9207,7 +9199,7 @@
         </p:nvSpPr>
         <p:spPr>
           <a:xfrm>
-            <a:off x="4005942" y="1387835"/>
+            <a:off x="3955702" y="1357691"/>
             <a:ext cx="1657198" cy="406475"/>
           </a:xfrm>
           <a:prstGeom prst="roundRect">
@@ -9270,7 +9262,7 @@
         </p:nvSpPr>
         <p:spPr>
           <a:xfrm>
-            <a:off x="4005942" y="2193378"/>
+            <a:off x="3955702" y="2163234"/>
             <a:ext cx="1657198" cy="406475"/>
           </a:xfrm>
           <a:prstGeom prst="roundRect">
@@ -9333,7 +9325,7 @@
         </p:nvSpPr>
         <p:spPr>
           <a:xfrm>
-            <a:off x="4005941" y="3053973"/>
+            <a:off x="3955701" y="3023829"/>
             <a:ext cx="1657197" cy="406475"/>
           </a:xfrm>
           <a:prstGeom prst="roundRect">
@@ -9451,23 +9443,31 @@
                   <a:schemeClr val="tx1"/>
                 </a:solidFill>
               </a:rPr>
-              <a:t>실제 업무 검증으로 웹서비스의 정확도와 사용성을 높이고</a:t>
-            </a:r>
-            <a:r>
-              <a:rPr lang="en-US" altLang="ko-KR" sz="1500" b="1" spc="-40">
+              <a:t>실제 업무 검증을 바탕으로 </a:t>
+            </a:r>
+            <a:r>
+              <a:rPr lang="ko-KR" altLang="en-US" sz="1500" b="1">
                 <a:solidFill>
                   <a:schemeClr val="tx1"/>
                 </a:solidFill>
               </a:rPr>
-              <a:t>, </a:t>
-            </a:r>
-            <a:r>
-              <a:rPr lang="ko-KR" altLang="en-US" sz="1500" b="1" spc="-40">
+              <a:t>서비스의 완성도를 높이고</a:t>
+            </a:r>
+            <a:r>
+              <a:rPr lang="en-US" altLang="ko-KR" sz="1500" b="1">
                 <a:solidFill>
                   <a:schemeClr val="tx1"/>
                 </a:solidFill>
               </a:rPr>
-              <a:t>검증된 업무부터 적용 범위를 단계적으로 확대</a:t>
+              <a:t>, </a:t>
+            </a:r>
+            <a:r>
+              <a:rPr lang="ko-KR" altLang="en-US" sz="1500" b="1">
+                <a:solidFill>
+                  <a:schemeClr val="tx1"/>
+                </a:solidFill>
+              </a:rPr>
+              <a:t>효과가 확인된 업무부터 적용 범위를 확대</a:t>
             </a:r>
             <a:endParaRPr lang="ko-KR" altLang="en-US" sz="1500" b="1" spc="-40">
               <a:solidFill>
@@ -9622,8 +9622,8 @@
         </p:nvSpPr>
         <p:spPr>
           <a:xfrm>
-            <a:off x="5713380" y="1325615"/>
-            <a:ext cx="4513889" cy="530915"/>
+            <a:off x="5663141" y="1295471"/>
+            <a:ext cx="4221088" cy="530915"/>
           </a:xfrm>
           <a:prstGeom prst="rect">
             <a:avLst/>
@@ -9726,7 +9726,7 @@
         </p:nvSpPr>
         <p:spPr>
           <a:xfrm>
-            <a:off x="5713381" y="2131158"/>
+            <a:off x="5663141" y="2101014"/>
             <a:ext cx="4101344" cy="530915"/>
           </a:xfrm>
           <a:prstGeom prst="rect">
@@ -9839,7 +9839,7 @@
         </p:nvSpPr>
         <p:spPr>
           <a:xfrm>
-            <a:off x="5713381" y="2872490"/>
+            <a:off x="5663141" y="2842346"/>
             <a:ext cx="4101344" cy="769441"/>
           </a:xfrm>
           <a:prstGeom prst="rect">
@@ -9870,7 +9870,7 @@
               <a:rPr lang="ko-KR" altLang="en-US" sz="1300">
                 <a:latin typeface="+mn-ea"/>
               </a:rPr>
-              <a:t>요청 내용 바탕으로 협업 메일 초안 작성</a:t>
+              <a:t>요청 내용을 바탕으로 협업 메일 초안 작성</a:t>
             </a:r>
             <a:endParaRPr lang="en-US" altLang="ko-KR" sz="1300">
               <a:latin typeface="+mn-ea"/>
@@ -9977,13 +9977,13 @@
           <p:nvPr/>
         </p:nvPicPr>
         <p:blipFill>
-          <a:blip r:embed="rId4">
+          <a:blip r:embed="rId3">
             <a:extLst>
               <a:ext uri="{28A0092B-C50C-407E-A947-70E740481C1C}">
                 <a14:useLocalDpi xmlns:a14="http://schemas.microsoft.com/office/drawing/2010/main" val="0"/>
               </a:ext>
               <a:ext uri="{96DAC541-7B7A-43D3-8B79-37D633B846F1}">
-                <asvg:svgBlip xmlns:asvg="http://schemas.microsoft.com/office/drawing/2016/SVG/main" r:embed="rId5"/>
+                <asvg:svgBlip xmlns:asvg="http://schemas.microsoft.com/office/drawing/2016/SVG/main" r:embed="rId4"/>
               </a:ext>
             </a:extLst>
           </a:blip>
@@ -9993,7 +9993,7 @@
         </p:blipFill>
         <p:spPr>
           <a:xfrm rot="5400000">
-            <a:off x="4586631" y="1684672"/>
+            <a:off x="4536391" y="1654528"/>
             <a:ext cx="362623" cy="624548"/>
           </a:xfrm>
           <a:prstGeom prst="rect">
@@ -10016,13 +10016,13 @@
           <p:nvPr/>
         </p:nvPicPr>
         <p:blipFill>
-          <a:blip r:embed="rId4">
+          <a:blip r:embed="rId3">
             <a:extLst>
               <a:ext uri="{28A0092B-C50C-407E-A947-70E740481C1C}">
                 <a14:useLocalDpi xmlns:a14="http://schemas.microsoft.com/office/drawing/2010/main" val="0"/>
               </a:ext>
               <a:ext uri="{96DAC541-7B7A-43D3-8B79-37D633B846F1}">
-                <asvg:svgBlip xmlns:asvg="http://schemas.microsoft.com/office/drawing/2016/SVG/main" r:embed="rId5"/>
+                <asvg:svgBlip xmlns:asvg="http://schemas.microsoft.com/office/drawing/2016/SVG/main" r:embed="rId4"/>
               </a:ext>
             </a:extLst>
           </a:blip>
@@ -10032,7 +10032,7 @@
         </p:blipFill>
         <p:spPr>
           <a:xfrm rot="5400000">
-            <a:off x="4586631" y="2511989"/>
+            <a:off x="4536391" y="2481845"/>
             <a:ext cx="362623" cy="624548"/>
           </a:xfrm>
           <a:prstGeom prst="rect">
@@ -10402,7 +10402,7 @@
         </p:nvSpPr>
         <p:spPr>
           <a:xfrm>
-            <a:off x="360341" y="4710124"/>
+            <a:off x="360341" y="4710123"/>
             <a:ext cx="2959800" cy="292388"/>
           </a:xfrm>
           <a:prstGeom prst="rect">
@@ -10532,8 +10532,8 @@
         </p:nvSpPr>
         <p:spPr>
           <a:xfrm>
-            <a:off x="3332140" y="4704153"/>
-            <a:ext cx="3536747" cy="298359"/>
+            <a:off x="3332140" y="4710123"/>
+            <a:ext cx="3631368" cy="292388"/>
           </a:xfrm>
           <a:prstGeom prst="rect">
             <a:avLst/>
@@ -10547,18 +10547,10 @@
           <a:lstStyle/>
           <a:p>
             <a:r>
-              <a:rPr lang="ko-KR" altLang="en-US" sz="1300" spc="-40"/>
-              <a:t>과제제안자</a:t>
-            </a:r>
-            <a:r>
-              <a:rPr lang="en-US" altLang="ko-KR" sz="1300" spc="-40"/>
-              <a:t>, </a:t>
-            </a:r>
-            <a:r>
-              <a:rPr lang="ko-KR" altLang="en-US" sz="1300" spc="-40"/>
-              <a:t>실제 담당자 대상 소규모 시범 운영</a:t>
-            </a:r>
-            <a:endParaRPr lang="ko-KR" altLang="en-US" sz="1300" spc="-40">
+              <a:rPr lang="ko-KR" altLang="en-US" sz="1300" spc="-60"/>
+              <a:t>과제제안자와 실제 담당자 대상 소규모 시범 운영</a:t>
+            </a:r>
+            <a:endParaRPr lang="ko-KR" altLang="en-US" sz="1300" spc="-60">
               <a:solidFill>
                 <a:schemeClr val="bg1">
                   <a:lumMod val="75000"/>
@@ -10633,7 +10625,7 @@
           <a:p>
             <a:r>
               <a:rPr lang="ko-KR" altLang="en-US" sz="1300" spc="-40"/>
-              <a:t>사용자 의견 반영 안내 방식 보완</a:t>
+              <a:t>사용자 의견 반영해 안내 방식 보완</a:t>
             </a:r>
           </a:p>
         </p:txBody>
@@ -10652,7 +10644,7 @@
         </p:nvSpPr>
         <p:spPr>
           <a:xfrm>
-            <a:off x="6868887" y="4710124"/>
+            <a:off x="6868887" y="4710123"/>
             <a:ext cx="2670365" cy="292388"/>
           </a:xfrm>
           <a:prstGeom prst="rect">
@@ -10766,6 +10758,36 @@
           </a:p>
         </p:txBody>
       </p:sp>
+      <p:pic>
+        <p:nvPicPr>
+          <p:cNvPr id="5" name="그림 4">
+            <a:extLst>
+              <a:ext uri="{FF2B5EF4-FFF2-40B4-BE49-F238E27FC236}">
+                <a16:creationId xmlns:a16="http://schemas.microsoft.com/office/drawing/2014/main" id="{049760FB-8D8D-449E-8EE8-5BBAD3465991}"/>
+              </a:ext>
+            </a:extLst>
+          </p:cNvPr>
+          <p:cNvPicPr>
+            <a:picLocks noChangeAspect="1"/>
+          </p:cNvPicPr>
+          <p:nvPr/>
+        </p:nvPicPr>
+        <p:blipFill>
+          <a:blip r:embed="rId5"/>
+          <a:stretch>
+            <a:fillRect/>
+          </a:stretch>
+        </p:blipFill>
+        <p:spPr>
+          <a:xfrm>
+            <a:off x="338291" y="1244475"/>
+            <a:ext cx="3497241" cy="2306915"/>
+          </a:xfrm>
+          <a:prstGeom prst="rect">
+            <a:avLst/>
+          </a:prstGeom>
+        </p:spPr>
+      </p:pic>
     </p:spTree>
     <p:extLst>
       <p:ext uri="{BB962C8B-B14F-4D97-AF65-F5344CB8AC3E}">

--- a/.codex-output/2609_업무 지침 네비게이터_발표자료.pptx
+++ b/.codex-output/2609_업무 지침 네비게이터_발표자료.pptx
@@ -10760,10 +10760,11 @@
       </p:sp>
       <p:pic>
         <p:nvPicPr>
-          <p:cNvPr id="5" name="그림 4">
+          <p:cNvPr id="11" name="그림 10">
+            <a:hlinkClick r:id="rId5" action="ppaction://hlinkfile"/>
             <a:extLst>
               <a:ext uri="{FF2B5EF4-FFF2-40B4-BE49-F238E27FC236}">
-                <a16:creationId xmlns:a16="http://schemas.microsoft.com/office/drawing/2014/main" id="{049760FB-8D8D-449E-8EE8-5BBAD3465991}"/>
+                <a16:creationId xmlns:a16="http://schemas.microsoft.com/office/drawing/2014/main" id="{1D50F15C-C904-4B41-B2EB-C4E409B40614}"/>
               </a:ext>
             </a:extLst>
           </p:cNvPr>
@@ -10773,15 +10774,15 @@
           <p:nvPr/>
         </p:nvPicPr>
         <p:blipFill>
-          <a:blip r:embed="rId5"/>
+          <a:blip r:embed="rId6"/>
           <a:stretch>
             <a:fillRect/>
           </a:stretch>
         </p:blipFill>
         <p:spPr>
           <a:xfrm>
-            <a:off x="338291" y="1244475"/>
-            <a:ext cx="3497241" cy="2306915"/>
+            <a:off x="388531" y="1258200"/>
+            <a:ext cx="3469595" cy="2233529"/>
           </a:xfrm>
           <a:prstGeom prst="rect">
             <a:avLst/>

--- a/.codex-output/2609_업무 지침 네비게이터_발표자료.pptx
+++ b/.codex-output/2609_업무 지침 네비게이터_발표자료.pptx
@@ -9199,7 +9199,7 @@
         </p:nvSpPr>
         <p:spPr>
           <a:xfrm>
-            <a:off x="3955702" y="1357691"/>
+            <a:off x="3955701" y="1357691"/>
             <a:ext cx="1657198" cy="406475"/>
           </a:xfrm>
           <a:prstGeom prst="roundRect">
@@ -9262,7 +9262,7 @@
         </p:nvSpPr>
         <p:spPr>
           <a:xfrm>
-            <a:off x="3955702" y="2163234"/>
+            <a:off x="3955701" y="2163234"/>
             <a:ext cx="1657198" cy="406475"/>
           </a:xfrm>
           <a:prstGeom prst="roundRect">
@@ -9325,7 +9325,7 @@
         </p:nvSpPr>
         <p:spPr>
           <a:xfrm>
-            <a:off x="3955701" y="3023829"/>
+            <a:off x="3955702" y="3023829"/>
             <a:ext cx="1657197" cy="406475"/>
           </a:xfrm>
           <a:prstGeom prst="roundRect">
@@ -9993,7 +9993,7 @@
         </p:blipFill>
         <p:spPr>
           <a:xfrm rot="5400000">
-            <a:off x="4536391" y="1654528"/>
+            <a:off x="4602989" y="1654528"/>
             <a:ext cx="362623" cy="624548"/>
           </a:xfrm>
           <a:prstGeom prst="rect">
@@ -10032,7 +10032,7 @@
         </p:blipFill>
         <p:spPr>
           <a:xfrm rot="5400000">
-            <a:off x="4536391" y="2481845"/>
+            <a:off x="4602989" y="2481845"/>
             <a:ext cx="362623" cy="624548"/>
           </a:xfrm>
           <a:prstGeom prst="rect">

--- a/.codex-output/2609_업무 지침 네비게이터_발표자료.pptx
+++ b/.codex-output/2609_업무 지침 네비게이터_발표자료.pptx
@@ -9199,7 +9199,7 @@
         </p:nvSpPr>
         <p:spPr>
           <a:xfrm>
-            <a:off x="3955701" y="1357691"/>
+            <a:off x="3955701" y="1337595"/>
             <a:ext cx="1657198" cy="406475"/>
           </a:xfrm>
           <a:prstGeom prst="roundRect">
@@ -9262,7 +9262,7 @@
         </p:nvSpPr>
         <p:spPr>
           <a:xfrm>
-            <a:off x="3955701" y="2163234"/>
+            <a:off x="3955701" y="2143138"/>
             <a:ext cx="1657198" cy="406475"/>
           </a:xfrm>
           <a:prstGeom prst="roundRect">
@@ -9325,7 +9325,7 @@
         </p:nvSpPr>
         <p:spPr>
           <a:xfrm>
-            <a:off x="3955702" y="3023829"/>
+            <a:off x="3955702" y="3003733"/>
             <a:ext cx="1657197" cy="406475"/>
           </a:xfrm>
           <a:prstGeom prst="roundRect">
@@ -9622,7 +9622,7 @@
         </p:nvSpPr>
         <p:spPr>
           <a:xfrm>
-            <a:off x="5663141" y="1295471"/>
+            <a:off x="5663141" y="1275375"/>
             <a:ext cx="4221088" cy="530915"/>
           </a:xfrm>
           <a:prstGeom prst="rect">
@@ -9726,7 +9726,7 @@
         </p:nvSpPr>
         <p:spPr>
           <a:xfrm>
-            <a:off x="5663141" y="2101014"/>
+            <a:off x="5663141" y="2080918"/>
             <a:ext cx="4101344" cy="530915"/>
           </a:xfrm>
           <a:prstGeom prst="rect">
@@ -9839,7 +9839,7 @@
         </p:nvSpPr>
         <p:spPr>
           <a:xfrm>
-            <a:off x="5663141" y="2842346"/>
+            <a:off x="5663141" y="2822250"/>
             <a:ext cx="4101344" cy="769441"/>
           </a:xfrm>
           <a:prstGeom prst="rect">
@@ -9993,7 +9993,7 @@
         </p:blipFill>
         <p:spPr>
           <a:xfrm rot="5400000">
-            <a:off x="4602989" y="1654528"/>
+            <a:off x="4602989" y="1634432"/>
             <a:ext cx="362623" cy="624548"/>
           </a:xfrm>
           <a:prstGeom prst="rect">
@@ -10032,7 +10032,7 @@
         </p:blipFill>
         <p:spPr>
           <a:xfrm rot="5400000">
-            <a:off x="4602989" y="2481845"/>
+            <a:off x="4602989" y="2461749"/>
             <a:ext cx="362623" cy="624548"/>
           </a:xfrm>
           <a:prstGeom prst="rect">

--- a/.codex-output/2609_업무 지침 네비게이터_발표자료.pptx
+++ b/.codex-output/2609_업무 지침 네비게이터_발표자료.pptx
@@ -1,6 +1,6 @@
 
 <file path=ppt/presentation.xml><?xml version="1.0" encoding="utf-8"?>
-<p:presentation xmlns:a="http://schemas.openxmlformats.org/drawingml/2006/main" xmlns:r="http://schemas.openxmlformats.org/officeDocument/2006/relationships" xmlns:p="http://schemas.openxmlformats.org/presentationml/2006/main">
+<p:presentation xmlns:a="http://schemas.openxmlformats.org/drawingml/2006/main" xmlns:r="http://schemas.openxmlformats.org/officeDocument/2006/relationships" xmlns:p="http://schemas.openxmlformats.org/presentationml/2006/main" embedTrueTypeFonts="1" saveSubsetFonts="1">
   <p:sldMasterIdLst>
     <p:sldMasterId id="2147483650" r:id="rId1"/>
   </p:sldMasterIdLst>
@@ -14,6 +14,29 @@
   </p:sldIdLst>
   <p:sldSz cx="9906000" cy="6858000" type="A4"/>
   <p:notesSz cx="6858000" cy="9144000"/>
+  <p:embeddedFontLst>
+    <p:embeddedFont>
+      <p:font typeface="Calibri" panose="020F0502020204030204" pitchFamily="34" charset="0"/>
+      <p:regular r:id="rId6"/>
+      <p:bold r:id="rId7"/>
+      <p:italic r:id="rId8"/>
+      <p:boldItalic r:id="rId9"/>
+    </p:embeddedFont>
+    <p:embeddedFont>
+      <p:font typeface="Calibri Light" panose="020F0302020204030204" pitchFamily="34" charset="0"/>
+      <p:regular r:id="rId10"/>
+      <p:italic r:id="rId11"/>
+    </p:embeddedFont>
+    <p:embeddedFont>
+      <p:font typeface="HY견고딕" panose="02030600000101010101" pitchFamily="18" charset="-127"/>
+      <p:regular r:id="rId12"/>
+    </p:embeddedFont>
+    <p:embeddedFont>
+      <p:font typeface="맑은 고딕" panose="020B0503020000020004" pitchFamily="50" charset="-127"/>
+      <p:regular r:id="rId13"/>
+      <p:bold r:id="rId14"/>
+    </p:embeddedFont>
+  </p:embeddedFontLst>
   <p:defaultTextStyle>
     <a:defPPr>
       <a:defRPr lang="ko-KR"/>
@@ -419,7 +442,7 @@
           <a:p>
             <a:fld id="{6AC0F0B2-DC44-4D7F-B9BC-23EB46679998}" type="datetimeFigureOut">
               <a:rPr lang="ko-KR" altLang="en-US" smtClean="0"/>
-              <a:t>2026-09-06</a:t>
+              <a:t>2026-09-08</a:t>
             </a:fld>
             <a:endParaRPr lang="ko-KR" altLang="en-US"/>
           </a:p>
@@ -589,7 +612,7 @@
           <a:p>
             <a:fld id="{6AC0F0B2-DC44-4D7F-B9BC-23EB46679998}" type="datetimeFigureOut">
               <a:rPr lang="ko-KR" altLang="en-US" smtClean="0"/>
-              <a:t>2026-09-06</a:t>
+              <a:t>2026-09-08</a:t>
             </a:fld>
             <a:endParaRPr lang="ko-KR" altLang="en-US"/>
           </a:p>
@@ -769,7 +792,7 @@
           <a:p>
             <a:fld id="{6AC0F0B2-DC44-4D7F-B9BC-23EB46679998}" type="datetimeFigureOut">
               <a:rPr lang="ko-KR" altLang="en-US" smtClean="0"/>
-              <a:t>2026-09-06</a:t>
+              <a:t>2026-09-08</a:t>
             </a:fld>
             <a:endParaRPr lang="ko-KR" altLang="en-US"/>
           </a:p>
@@ -939,7 +962,7 @@
           <a:p>
             <a:fld id="{6AC0F0B2-DC44-4D7F-B9BC-23EB46679998}" type="datetimeFigureOut">
               <a:rPr lang="ko-KR" altLang="en-US" smtClean="0"/>
-              <a:t>2026-09-06</a:t>
+              <a:t>2026-09-08</a:t>
             </a:fld>
             <a:endParaRPr lang="ko-KR" altLang="en-US"/>
           </a:p>
@@ -1183,7 +1206,7 @@
           <a:p>
             <a:fld id="{6AC0F0B2-DC44-4D7F-B9BC-23EB46679998}" type="datetimeFigureOut">
               <a:rPr lang="ko-KR" altLang="en-US" smtClean="0"/>
-              <a:t>2026-09-06</a:t>
+              <a:t>2026-09-08</a:t>
             </a:fld>
             <a:endParaRPr lang="ko-KR" altLang="en-US"/>
           </a:p>
@@ -1415,7 +1438,7 @@
           <a:p>
             <a:fld id="{6AC0F0B2-DC44-4D7F-B9BC-23EB46679998}" type="datetimeFigureOut">
               <a:rPr lang="ko-KR" altLang="en-US" smtClean="0"/>
-              <a:t>2026-09-06</a:t>
+              <a:t>2026-09-08</a:t>
             </a:fld>
             <a:endParaRPr lang="ko-KR" altLang="en-US"/>
           </a:p>
@@ -1782,7 +1805,7 @@
           <a:p>
             <a:fld id="{6AC0F0B2-DC44-4D7F-B9BC-23EB46679998}" type="datetimeFigureOut">
               <a:rPr lang="ko-KR" altLang="en-US" smtClean="0"/>
-              <a:t>2026-09-06</a:t>
+              <a:t>2026-09-08</a:t>
             </a:fld>
             <a:endParaRPr lang="ko-KR" altLang="en-US"/>
           </a:p>
@@ -1900,7 +1923,7 @@
           <a:p>
             <a:fld id="{6AC0F0B2-DC44-4D7F-B9BC-23EB46679998}" type="datetimeFigureOut">
               <a:rPr lang="ko-KR" altLang="en-US" smtClean="0"/>
-              <a:t>2026-09-06</a:t>
+              <a:t>2026-09-08</a:t>
             </a:fld>
             <a:endParaRPr lang="ko-KR" altLang="en-US"/>
           </a:p>
@@ -1995,7 +2018,7 @@
           <a:p>
             <a:fld id="{6AC0F0B2-DC44-4D7F-B9BC-23EB46679998}" type="datetimeFigureOut">
               <a:rPr lang="ko-KR" altLang="en-US" smtClean="0"/>
-              <a:t>2026-09-06</a:t>
+              <a:t>2026-09-08</a:t>
             </a:fld>
             <a:endParaRPr lang="ko-KR" altLang="en-US"/>
           </a:p>
@@ -2272,7 +2295,7 @@
           <a:p>
             <a:fld id="{6AC0F0B2-DC44-4D7F-B9BC-23EB46679998}" type="datetimeFigureOut">
               <a:rPr lang="ko-KR" altLang="en-US" smtClean="0"/>
-              <a:t>2026-09-06</a:t>
+              <a:t>2026-09-08</a:t>
             </a:fld>
             <a:endParaRPr lang="ko-KR" altLang="en-US"/>
           </a:p>
@@ -2529,7 +2552,7 @@
           <a:p>
             <a:fld id="{6AC0F0B2-DC44-4D7F-B9BC-23EB46679998}" type="datetimeFigureOut">
               <a:rPr lang="ko-KR" altLang="en-US" smtClean="0"/>
-              <a:t>2026-09-06</a:t>
+              <a:t>2026-09-08</a:t>
             </a:fld>
             <a:endParaRPr lang="ko-KR" altLang="en-US"/>
           </a:p>
@@ -2742,7 +2765,7 @@
           <a:p>
             <a:fld id="{6AC0F0B2-DC44-4D7F-B9BC-23EB46679998}" type="datetimeFigureOut">
               <a:rPr lang="ko-KR" altLang="en-US" smtClean="0"/>
-              <a:t>2026-09-06</a:t>
+              <a:t>2026-09-08</a:t>
             </a:fld>
             <a:endParaRPr lang="ko-KR" altLang="en-US"/>
           </a:p>
@@ -7356,8 +7379,8 @@
         </p:nvSpPr>
         <p:spPr>
           <a:xfrm>
-            <a:off x="2219662" y="4424187"/>
-            <a:ext cx="4986678" cy="530915"/>
+            <a:off x="2219662" y="4303610"/>
+            <a:ext cx="4986678" cy="769441"/>
           </a:xfrm>
           <a:prstGeom prst="rect">
             <a:avLst/>
@@ -7399,7 +7422,7 @@
               <a:rPr lang="ko-KR" altLang="en-US" sz="1300" spc="-40">
                 <a:latin typeface="+mn-ea"/>
               </a:rPr>
-              <a:t> 기능 정의 지속 업데이트</a:t>
+              <a:t> 기능 정의 업데이트</a:t>
             </a:r>
             <a:endParaRPr lang="en-US" altLang="ko-KR" sz="1300" spc="-40">
               <a:latin typeface="+mn-ea"/>
@@ -7425,6 +7448,37 @@
               </a:rPr>
               <a:t>그래프 등 교육내용을 반영해 요구사항과 구현 방향 지속 개선</a:t>
             </a:r>
+            <a:endParaRPr lang="en-US" altLang="ko-KR" sz="1300" spc="-40">
+              <a:latin typeface="+mn-ea"/>
+            </a:endParaRPr>
+          </a:p>
+          <a:p>
+            <a:pPr marL="87313" indent="-87313">
+              <a:spcBef>
+                <a:spcPts val="300"/>
+              </a:spcBef>
+              <a:buFont typeface="Wingdings" panose="05000000000000000000" pitchFamily="2" charset="2"/>
+              <a:buChar char="§"/>
+            </a:pPr>
+            <a:r>
+              <a:rPr lang="en-US" altLang="ko-KR" sz="1300" spc="-40">
+                <a:latin typeface="+mn-ea"/>
+              </a:rPr>
+              <a:t> RAG, </a:t>
+            </a:r>
+            <a:r>
+              <a:rPr lang="ko-KR" altLang="en-US" sz="1300" spc="-40">
+                <a:latin typeface="+mn-ea"/>
+              </a:rPr>
+              <a:t>메타데이터 등 </a:t>
+            </a:r>
+            <a:r>
+              <a:rPr lang="ko-KR" altLang="en-US" sz="1300" spc="-40"/>
+              <a:t>개념을 실제 구현과정과 비교하며 이해</a:t>
+            </a:r>
+            <a:endParaRPr lang="ko-KR" altLang="en-US" sz="1300" spc="-40">
+              <a:latin typeface="+mn-ea"/>
+            </a:endParaRPr>
           </a:p>
         </p:txBody>
       </p:sp>
@@ -7598,7 +7652,7 @@
               <a:rPr lang="ko-KR" altLang="en-US" sz="1300">
                 <a:latin typeface="+mn-ea"/>
               </a:rPr>
-              <a:t>사용자가 실제로 질문할 만한 대표 질의 검토</a:t>
+              <a:t>사용자가 실제로 질문할 만한 대표 질의 선정</a:t>
             </a:r>
             <a:endParaRPr lang="en-US" altLang="ko-KR" sz="1300">
               <a:latin typeface="+mn-ea"/>
@@ -7705,7 +7759,7 @@
               <a:rPr lang="ko-KR" altLang="en-US" sz="1300">
                 <a:latin typeface="+mn-ea"/>
               </a:rPr>
-              <a:t>데이터 보완 과정을 반복하며 서비스 정확도 개선</a:t>
+              <a:t>데이터 보완 과정을 반복하며 서비스 정확도 개선 </a:t>
             </a:r>
             <a:endParaRPr lang="en-US" altLang="ko-KR" sz="1300" spc="-40">
               <a:solidFill>
@@ -7960,7 +8014,7 @@
         </p:blipFill>
         <p:spPr>
           <a:xfrm>
-            <a:off x="6930133" y="4401716"/>
+            <a:off x="7080854" y="4401716"/>
             <a:ext cx="1350499" cy="808874"/>
           </a:xfrm>
           <a:prstGeom prst="rect">
@@ -7982,8 +8036,8 @@
         </p:nvSpPr>
         <p:spPr>
           <a:xfrm>
-            <a:off x="2219662" y="5237422"/>
-            <a:ext cx="4489402" cy="530915"/>
+            <a:off x="2219661" y="5126894"/>
+            <a:ext cx="4861193" cy="769441"/>
           </a:xfrm>
           <a:prstGeom prst="rect">
             <a:avLst/>
@@ -8049,7 +8103,7 @@
               <a:rPr lang="ko-KR" altLang="en-US" sz="1300" spc="-40">
                 <a:latin typeface="+mn-ea"/>
               </a:rPr>
-              <a:t>반영 개발</a:t>
+              <a:t>반영해 개발</a:t>
             </a:r>
             <a:endParaRPr lang="en-US" altLang="ko-KR" sz="1300" spc="-40">
               <a:latin typeface="+mn-ea"/>
@@ -8098,6 +8152,42 @@
                 <a:latin typeface="+mn-ea"/>
               </a:rPr>
               <a:t>메일링 등 기능 확장</a:t>
+            </a:r>
+            <a:endParaRPr lang="en-US" altLang="ko-KR" sz="1300" spc="-40">
+              <a:latin typeface="+mn-ea"/>
+            </a:endParaRPr>
+          </a:p>
+          <a:p>
+            <a:pPr marL="87313" indent="-87313">
+              <a:spcBef>
+                <a:spcPts val="300"/>
+              </a:spcBef>
+              <a:buFont typeface="Wingdings" panose="05000000000000000000" pitchFamily="2" charset="2"/>
+              <a:buChar char="§"/>
+            </a:pPr>
+            <a:r>
+              <a:rPr lang="en-US" altLang="ko-KR" sz="1300" spc="-40">
+                <a:latin typeface="+mn-ea"/>
+              </a:rPr>
+              <a:t> </a:t>
+            </a:r>
+            <a:r>
+              <a:rPr lang="ko-KR" altLang="en-US" sz="1300" spc="-40">
+                <a:latin typeface="+mn-ea"/>
+              </a:rPr>
+              <a:t>업무 지침을 검색 로직과 연결하여 절차</a:t>
+            </a:r>
+            <a:r>
+              <a:rPr lang="en-US" altLang="ko-KR" sz="1300" spc="-40">
+                <a:latin typeface="+mn-ea"/>
+              </a:rPr>
+              <a:t>·</a:t>
+            </a:r>
+            <a:r>
+              <a:rPr lang="ko-KR" altLang="en-US" sz="1300" spc="-40">
+                <a:latin typeface="+mn-ea"/>
+              </a:rPr>
+              <a:t>부서 추천 기능 구현</a:t>
             </a:r>
             <a:endParaRPr lang="en-US" altLang="ko-KR" sz="1300" spc="-40">
               <a:latin typeface="+mn-ea"/>
@@ -8226,7 +8316,7 @@
         </p:blipFill>
         <p:spPr>
           <a:xfrm>
-            <a:off x="8042874" y="4918963"/>
+            <a:off x="8133309" y="4918963"/>
             <a:ext cx="1336503" cy="794758"/>
           </a:xfrm>
           <a:prstGeom prst="rect">

--- a/.codex-output/2609_업무 지침 네비게이터_발표자료.pptx
+++ b/.codex-output/2609_업무 지침 네비게이터_발표자료.pptx
@@ -4864,7 +4864,7 @@
         </p:nvSpPr>
         <p:spPr>
           <a:xfrm>
-            <a:off x="7290813" y="2861018"/>
+            <a:off x="7283733" y="2861018"/>
             <a:ext cx="647700" cy="228600"/>
           </a:xfrm>
           <a:prstGeom prst="roundRect">
